--- a/docs/database-structure.pptx
+++ b/docs/database-structure.pptx
@@ -1763,8 +1763,8 @@
         </p:nvSpPr>
         <p:spPr>
           <a:xfrm>
-            <a:off x="1463040" y="3758184"/>
-            <a:ext cx="27432" cy="0"/>
+            <a:off x="822960" y="2304288"/>
+            <a:ext cx="0" cy="301752"/>
           </a:xfrm>
           <a:prstGeom prst="line">
             <a:avLst/>
@@ -1786,8 +1786,8 @@
         </p:nvSpPr>
         <p:spPr>
           <a:xfrm>
-            <a:off x="1490472" y="3758184"/>
-            <a:ext cx="155448" cy="0"/>
+            <a:off x="4389120" y="2889504"/>
+            <a:ext cx="59436" cy="0"/>
           </a:xfrm>
           <a:prstGeom prst="line">
             <a:avLst/>
@@ -1795,15 +1795,360 @@
           <a:noFill/>
           <a:ln w="12700">
             <a:solidFill>
-              <a:srgbClr val="6B7280"/>
-            </a:solidFill>
-            <a:prstDash val="solid"/>
+              <a:srgbClr val="2563EB"/>
+            </a:solidFill>
+            <a:prstDash val="sysDot"/>
           </a:ln>
         </p:spPr>
       </p:sp>
       <p:sp>
         <p:nvSpPr>
           <p:cNvPr id="37" name="Shape 35"/>
+          <p:cNvSpPr/>
+          <p:nvPr/>
+        </p:nvSpPr>
+        <p:spPr>
+          <a:xfrm>
+            <a:off x="4448556" y="2112264"/>
+            <a:ext cx="0" cy="777240"/>
+          </a:xfrm>
+          <a:prstGeom prst="line">
+            <a:avLst/>
+          </a:prstGeom>
+          <a:noFill/>
+          <a:ln w="12700">
+            <a:solidFill>
+              <a:srgbClr val="2563EB"/>
+            </a:solidFill>
+            <a:prstDash val="sysDot"/>
+          </a:ln>
+        </p:spPr>
+      </p:sp>
+      <p:sp>
+        <p:nvSpPr>
+          <p:cNvPr id="38" name="Shape 36"/>
+          <p:cNvSpPr/>
+          <p:nvPr/>
+        </p:nvSpPr>
+        <p:spPr>
+          <a:xfrm>
+            <a:off x="4448556" y="2112264"/>
+            <a:ext cx="1586484" cy="0"/>
+          </a:xfrm>
+          <a:prstGeom prst="line">
+            <a:avLst/>
+          </a:prstGeom>
+          <a:noFill/>
+          <a:ln w="12700">
+            <a:solidFill>
+              <a:srgbClr val="2563EB"/>
+            </a:solidFill>
+            <a:prstDash val="sysDot"/>
+          </a:ln>
+        </p:spPr>
+      </p:sp>
+      <p:sp>
+        <p:nvSpPr>
+          <p:cNvPr id="39" name="Shape 37"/>
+          <p:cNvSpPr/>
+          <p:nvPr/>
+        </p:nvSpPr>
+        <p:spPr>
+          <a:xfrm>
+            <a:off x="5852160" y="3758184"/>
+            <a:ext cx="91440" cy="0"/>
+          </a:xfrm>
+          <a:prstGeom prst="line">
+            <a:avLst/>
+          </a:prstGeom>
+          <a:noFill/>
+          <a:ln w="12700">
+            <a:solidFill>
+              <a:srgbClr val="2563EB"/>
+            </a:solidFill>
+            <a:prstDash val="sysDot"/>
+          </a:ln>
+        </p:spPr>
+      </p:sp>
+      <p:sp>
+        <p:nvSpPr>
+          <p:cNvPr id="40" name="Shape 38"/>
+          <p:cNvSpPr/>
+          <p:nvPr/>
+        </p:nvSpPr>
+        <p:spPr>
+          <a:xfrm>
+            <a:off x="5943600" y="2176272"/>
+            <a:ext cx="0" cy="1581912"/>
+          </a:xfrm>
+          <a:prstGeom prst="line">
+            <a:avLst/>
+          </a:prstGeom>
+          <a:noFill/>
+          <a:ln w="12700">
+            <a:solidFill>
+              <a:srgbClr val="2563EB"/>
+            </a:solidFill>
+            <a:prstDash val="sysDot"/>
+          </a:ln>
+        </p:spPr>
+      </p:sp>
+      <p:sp>
+        <p:nvSpPr>
+          <p:cNvPr id="41" name="Shape 39"/>
+          <p:cNvSpPr/>
+          <p:nvPr/>
+        </p:nvSpPr>
+        <p:spPr>
+          <a:xfrm>
+            <a:off x="5943600" y="2176272"/>
+            <a:ext cx="91440" cy="0"/>
+          </a:xfrm>
+          <a:prstGeom prst="line">
+            <a:avLst/>
+          </a:prstGeom>
+          <a:noFill/>
+          <a:ln w="12700">
+            <a:solidFill>
+              <a:srgbClr val="2563EB"/>
+            </a:solidFill>
+            <a:prstDash val="sysDot"/>
+          </a:ln>
+        </p:spPr>
+      </p:sp>
+      <p:sp>
+        <p:nvSpPr>
+          <p:cNvPr id="42" name="Shape 40"/>
+          <p:cNvSpPr/>
+          <p:nvPr/>
+        </p:nvSpPr>
+        <p:spPr>
+          <a:xfrm>
+            <a:off x="4389120" y="3758184"/>
+            <a:ext cx="91440" cy="0"/>
+          </a:xfrm>
+          <a:prstGeom prst="line">
+            <a:avLst/>
+          </a:prstGeom>
+          <a:noFill/>
+          <a:ln w="12700">
+            <a:solidFill>
+              <a:srgbClr val="2563EB"/>
+            </a:solidFill>
+            <a:prstDash val="sysDot"/>
+          </a:ln>
+        </p:spPr>
+      </p:sp>
+      <p:sp>
+        <p:nvSpPr>
+          <p:cNvPr id="43" name="Shape 41"/>
+          <p:cNvSpPr/>
+          <p:nvPr/>
+        </p:nvSpPr>
+        <p:spPr>
+          <a:xfrm>
+            <a:off x="4480560" y="2240280"/>
+            <a:ext cx="0" cy="1517904"/>
+          </a:xfrm>
+          <a:prstGeom prst="line">
+            <a:avLst/>
+          </a:prstGeom>
+          <a:noFill/>
+          <a:ln w="12700">
+            <a:solidFill>
+              <a:srgbClr val="2563EB"/>
+            </a:solidFill>
+            <a:prstDash val="sysDot"/>
+          </a:ln>
+        </p:spPr>
+      </p:sp>
+      <p:sp>
+        <p:nvSpPr>
+          <p:cNvPr id="44" name="Shape 42"/>
+          <p:cNvSpPr/>
+          <p:nvPr/>
+        </p:nvSpPr>
+        <p:spPr>
+          <a:xfrm>
+            <a:off x="4480560" y="2240280"/>
+            <a:ext cx="1554480" cy="0"/>
+          </a:xfrm>
+          <a:prstGeom prst="line">
+            <a:avLst/>
+          </a:prstGeom>
+          <a:noFill/>
+          <a:ln w="12700">
+            <a:solidFill>
+              <a:srgbClr val="2563EB"/>
+            </a:solidFill>
+            <a:prstDash val="sysDot"/>
+          </a:ln>
+        </p:spPr>
+      </p:sp>
+      <p:sp>
+        <p:nvSpPr>
+          <p:cNvPr id="45" name="Shape 43"/>
+          <p:cNvSpPr/>
+          <p:nvPr/>
+        </p:nvSpPr>
+        <p:spPr>
+          <a:xfrm>
+            <a:off x="3749040" y="3172968"/>
+            <a:ext cx="0" cy="301752"/>
+          </a:xfrm>
+          <a:prstGeom prst="line">
+            <a:avLst/>
+          </a:prstGeom>
+          <a:noFill/>
+          <a:ln w="12700">
+            <a:solidFill>
+              <a:srgbClr val="2563EB"/>
+            </a:solidFill>
+            <a:prstDash val="sysDot"/>
+          </a:ln>
+        </p:spPr>
+      </p:sp>
+      <p:sp>
+        <p:nvSpPr>
+          <p:cNvPr id="46" name="Shape 44"/>
+          <p:cNvSpPr/>
+          <p:nvPr/>
+        </p:nvSpPr>
+        <p:spPr>
+          <a:xfrm>
+            <a:off x="4389120" y="3758184"/>
+            <a:ext cx="91440" cy="0"/>
+          </a:xfrm>
+          <a:prstGeom prst="line">
+            <a:avLst/>
+          </a:prstGeom>
+          <a:noFill/>
+          <a:ln w="12700">
+            <a:solidFill>
+              <a:srgbClr val="2563EB"/>
+            </a:solidFill>
+            <a:prstDash val="sysDot"/>
+          </a:ln>
+        </p:spPr>
+      </p:sp>
+      <p:sp>
+        <p:nvSpPr>
+          <p:cNvPr id="47" name="Shape 45"/>
+          <p:cNvSpPr/>
+          <p:nvPr/>
+        </p:nvSpPr>
+        <p:spPr>
+          <a:xfrm>
+            <a:off x="4480560" y="3758184"/>
+            <a:ext cx="0" cy="91440"/>
+          </a:xfrm>
+          <a:prstGeom prst="line">
+            <a:avLst/>
+          </a:prstGeom>
+          <a:noFill/>
+          <a:ln w="12700">
+            <a:solidFill>
+              <a:srgbClr val="2563EB"/>
+            </a:solidFill>
+            <a:prstDash val="sysDot"/>
+          </a:ln>
+        </p:spPr>
+      </p:sp>
+      <p:sp>
+        <p:nvSpPr>
+          <p:cNvPr id="48" name="Shape 46"/>
+          <p:cNvSpPr/>
+          <p:nvPr/>
+        </p:nvSpPr>
+        <p:spPr>
+          <a:xfrm>
+            <a:off x="4480560" y="3849624"/>
+            <a:ext cx="91440" cy="0"/>
+          </a:xfrm>
+          <a:prstGeom prst="line">
+            <a:avLst/>
+          </a:prstGeom>
+          <a:noFill/>
+          <a:ln w="12700">
+            <a:solidFill>
+              <a:srgbClr val="2563EB"/>
+            </a:solidFill>
+            <a:prstDash val="sysDot"/>
+          </a:ln>
+        </p:spPr>
+      </p:sp>
+      <p:sp>
+        <p:nvSpPr>
+          <p:cNvPr id="49" name="Shape 47"/>
+          <p:cNvSpPr/>
+          <p:nvPr/>
+        </p:nvSpPr>
+        <p:spPr>
+          <a:xfrm>
+            <a:off x="1522476" y="3758184"/>
+            <a:ext cx="123444" cy="0"/>
+          </a:xfrm>
+          <a:prstGeom prst="line">
+            <a:avLst/>
+          </a:prstGeom>
+          <a:noFill/>
+          <a:ln w="12700">
+            <a:solidFill>
+              <a:srgbClr val="2563EB"/>
+            </a:solidFill>
+            <a:prstDash val="sysDot"/>
+          </a:ln>
+        </p:spPr>
+      </p:sp>
+      <p:sp>
+        <p:nvSpPr>
+          <p:cNvPr id="50" name="Shape 48"/>
+          <p:cNvSpPr/>
+          <p:nvPr/>
+        </p:nvSpPr>
+        <p:spPr>
+          <a:xfrm>
+            <a:off x="1522476" y="3758184"/>
+            <a:ext cx="0" cy="91440"/>
+          </a:xfrm>
+          <a:prstGeom prst="line">
+            <a:avLst/>
+          </a:prstGeom>
+          <a:noFill/>
+          <a:ln w="12700">
+            <a:solidFill>
+              <a:srgbClr val="2563EB"/>
+            </a:solidFill>
+            <a:prstDash val="sysDot"/>
+          </a:ln>
+        </p:spPr>
+      </p:sp>
+      <p:sp>
+        <p:nvSpPr>
+          <p:cNvPr id="51" name="Shape 49"/>
+          <p:cNvSpPr/>
+          <p:nvPr/>
+        </p:nvSpPr>
+        <p:spPr>
+          <a:xfrm>
+            <a:off x="1463040" y="3849624"/>
+            <a:ext cx="59436" cy="0"/>
+          </a:xfrm>
+          <a:prstGeom prst="line">
+            <a:avLst/>
+          </a:prstGeom>
+          <a:noFill/>
+          <a:ln w="12700">
+            <a:solidFill>
+              <a:srgbClr val="2563EB"/>
+            </a:solidFill>
+            <a:prstDash val="sysDot"/>
+          </a:ln>
+        </p:spPr>
+      </p:sp>
+      <p:sp>
+        <p:nvSpPr>
+          <p:cNvPr id="52" name="Shape 50"/>
           <p:cNvSpPr/>
           <p:nvPr/>
         </p:nvSpPr>
@@ -1828,7 +2173,7 @@
       </p:sp>
       <p:sp>
         <p:nvSpPr>
-          <p:cNvPr id="38" name="Shape 36"/>
+          <p:cNvPr id="53" name="Shape 51"/>
           <p:cNvSpPr/>
           <p:nvPr/>
         </p:nvSpPr>
@@ -1853,7 +2198,7 @@
       </p:sp>
       <p:sp>
         <p:nvSpPr>
-          <p:cNvPr id="39" name="Text 37"/>
+          <p:cNvPr id="54" name="Text 52"/>
           <p:cNvSpPr/>
           <p:nvPr/>
         </p:nvSpPr>
@@ -1892,7 +2237,7 @@
       </p:sp>
       <p:sp>
         <p:nvSpPr>
-          <p:cNvPr id="40" name="Text 38"/>
+          <p:cNvPr id="55" name="Text 53"/>
           <p:cNvSpPr/>
           <p:nvPr/>
         </p:nvSpPr>
@@ -1931,7 +2276,7 @@
       </p:sp>
       <p:sp>
         <p:nvSpPr>
-          <p:cNvPr id="41" name="Shape 39"/>
+          <p:cNvPr id="56" name="Shape 54"/>
           <p:cNvSpPr/>
           <p:nvPr/>
         </p:nvSpPr>
@@ -1956,7 +2301,7 @@
       </p:sp>
       <p:sp>
         <p:nvSpPr>
-          <p:cNvPr id="42" name="Shape 40"/>
+          <p:cNvPr id="57" name="Shape 55"/>
           <p:cNvSpPr/>
           <p:nvPr/>
         </p:nvSpPr>
@@ -1981,7 +2326,7 @@
       </p:sp>
       <p:sp>
         <p:nvSpPr>
-          <p:cNvPr id="43" name="Text 41"/>
+          <p:cNvPr id="58" name="Text 56"/>
           <p:cNvSpPr/>
           <p:nvPr/>
         </p:nvSpPr>
@@ -2020,7 +2365,7 @@
       </p:sp>
       <p:sp>
         <p:nvSpPr>
-          <p:cNvPr id="44" name="Text 42"/>
+          <p:cNvPr id="59" name="Text 57"/>
           <p:cNvSpPr/>
           <p:nvPr/>
         </p:nvSpPr>
@@ -2076,7 +2421,7 @@
       </p:sp>
       <p:sp>
         <p:nvSpPr>
-          <p:cNvPr id="45" name="Shape 43"/>
+          <p:cNvPr id="60" name="Shape 58"/>
           <p:cNvSpPr/>
           <p:nvPr/>
         </p:nvSpPr>
@@ -2101,7 +2446,7 @@
       </p:sp>
       <p:sp>
         <p:nvSpPr>
-          <p:cNvPr id="46" name="Shape 44"/>
+          <p:cNvPr id="61" name="Shape 59"/>
           <p:cNvSpPr/>
           <p:nvPr/>
         </p:nvSpPr>
@@ -2126,7 +2471,7 @@
       </p:sp>
       <p:sp>
         <p:nvSpPr>
-          <p:cNvPr id="47" name="Text 45"/>
+          <p:cNvPr id="62" name="Text 60"/>
           <p:cNvSpPr/>
           <p:nvPr/>
         </p:nvSpPr>
@@ -2165,7 +2510,7 @@
       </p:sp>
       <p:sp>
         <p:nvSpPr>
-          <p:cNvPr id="48" name="Text 46"/>
+          <p:cNvPr id="63" name="Text 61"/>
           <p:cNvSpPr/>
           <p:nvPr/>
         </p:nvSpPr>
@@ -2204,7 +2549,7 @@
       </p:sp>
       <p:sp>
         <p:nvSpPr>
-          <p:cNvPr id="49" name="Shape 47"/>
+          <p:cNvPr id="64" name="Shape 62"/>
           <p:cNvSpPr/>
           <p:nvPr/>
         </p:nvSpPr>
@@ -2229,7 +2574,7 @@
       </p:sp>
       <p:sp>
         <p:nvSpPr>
-          <p:cNvPr id="50" name="Shape 48"/>
+          <p:cNvPr id="65" name="Shape 63"/>
           <p:cNvSpPr/>
           <p:nvPr/>
         </p:nvSpPr>
@@ -2254,7 +2599,7 @@
       </p:sp>
       <p:sp>
         <p:nvSpPr>
-          <p:cNvPr id="51" name="Text 49"/>
+          <p:cNvPr id="66" name="Text 64"/>
           <p:cNvSpPr/>
           <p:nvPr/>
         </p:nvSpPr>
@@ -2293,7 +2638,7 @@
       </p:sp>
       <p:sp>
         <p:nvSpPr>
-          <p:cNvPr id="52" name="Text 50"/>
+          <p:cNvPr id="67" name="Text 65"/>
           <p:cNvSpPr/>
           <p:nvPr/>
         </p:nvSpPr>
@@ -2349,7 +2694,7 @@
       </p:sp>
       <p:sp>
         <p:nvSpPr>
-          <p:cNvPr id="53" name="Shape 51"/>
+          <p:cNvPr id="68" name="Shape 66"/>
           <p:cNvSpPr/>
           <p:nvPr/>
         </p:nvSpPr>
@@ -2374,7 +2719,7 @@
       </p:sp>
       <p:sp>
         <p:nvSpPr>
-          <p:cNvPr id="54" name="Shape 52"/>
+          <p:cNvPr id="69" name="Shape 67"/>
           <p:cNvSpPr/>
           <p:nvPr/>
         </p:nvSpPr>
@@ -2399,7 +2744,7 @@
       </p:sp>
       <p:sp>
         <p:nvSpPr>
-          <p:cNvPr id="55" name="Text 53"/>
+          <p:cNvPr id="70" name="Text 68"/>
           <p:cNvSpPr/>
           <p:nvPr/>
         </p:nvSpPr>
@@ -2438,7 +2783,7 @@
       </p:sp>
       <p:sp>
         <p:nvSpPr>
-          <p:cNvPr id="56" name="Text 54"/>
+          <p:cNvPr id="71" name="Text 69"/>
           <p:cNvSpPr/>
           <p:nvPr/>
         </p:nvSpPr>
@@ -2477,7 +2822,7 @@
       </p:sp>
       <p:sp>
         <p:nvSpPr>
-          <p:cNvPr id="57" name="Shape 55"/>
+          <p:cNvPr id="72" name="Shape 70"/>
           <p:cNvSpPr/>
           <p:nvPr/>
         </p:nvSpPr>
@@ -2502,7 +2847,7 @@
       </p:sp>
       <p:sp>
         <p:nvSpPr>
-          <p:cNvPr id="58" name="Shape 56"/>
+          <p:cNvPr id="73" name="Shape 71"/>
           <p:cNvSpPr/>
           <p:nvPr/>
         </p:nvSpPr>
@@ -2527,7 +2872,7 @@
       </p:sp>
       <p:sp>
         <p:nvSpPr>
-          <p:cNvPr id="59" name="Text 57"/>
+          <p:cNvPr id="74" name="Text 72"/>
           <p:cNvSpPr/>
           <p:nvPr/>
         </p:nvSpPr>
@@ -2566,7 +2911,7 @@
       </p:sp>
       <p:sp>
         <p:nvSpPr>
-          <p:cNvPr id="60" name="Text 58"/>
+          <p:cNvPr id="75" name="Text 73"/>
           <p:cNvSpPr/>
           <p:nvPr/>
         </p:nvSpPr>
@@ -2622,7 +2967,7 @@
       </p:sp>
       <p:sp>
         <p:nvSpPr>
-          <p:cNvPr id="61" name="Shape 59"/>
+          <p:cNvPr id="76" name="Shape 74"/>
           <p:cNvSpPr/>
           <p:nvPr/>
         </p:nvSpPr>
@@ -2647,7 +2992,7 @@
       </p:sp>
       <p:sp>
         <p:nvSpPr>
-          <p:cNvPr id="62" name="Shape 60"/>
+          <p:cNvPr id="77" name="Shape 75"/>
           <p:cNvSpPr/>
           <p:nvPr/>
         </p:nvSpPr>
@@ -2672,7 +3017,7 @@
       </p:sp>
       <p:sp>
         <p:nvSpPr>
-          <p:cNvPr id="63" name="Text 61"/>
+          <p:cNvPr id="78" name="Text 76"/>
           <p:cNvSpPr/>
           <p:nvPr/>
         </p:nvSpPr>
@@ -2711,7 +3056,7 @@
       </p:sp>
       <p:sp>
         <p:nvSpPr>
-          <p:cNvPr id="64" name="Text 62"/>
+          <p:cNvPr id="79" name="Text 77"/>
           <p:cNvSpPr/>
           <p:nvPr/>
         </p:nvSpPr>
@@ -2767,7 +3112,7 @@
       </p:sp>
       <p:sp>
         <p:nvSpPr>
-          <p:cNvPr id="65" name="Shape 63"/>
+          <p:cNvPr id="80" name="Shape 78"/>
           <p:cNvSpPr/>
           <p:nvPr/>
         </p:nvSpPr>
@@ -2792,7 +3137,7 @@
       </p:sp>
       <p:sp>
         <p:nvSpPr>
-          <p:cNvPr id="66" name="Shape 64"/>
+          <p:cNvPr id="81" name="Shape 79"/>
           <p:cNvSpPr/>
           <p:nvPr/>
         </p:nvSpPr>
@@ -2817,7 +3162,7 @@
       </p:sp>
       <p:sp>
         <p:nvSpPr>
-          <p:cNvPr id="67" name="Text 65"/>
+          <p:cNvPr id="82" name="Text 80"/>
           <p:cNvSpPr/>
           <p:nvPr/>
         </p:nvSpPr>
@@ -2856,7 +3201,7 @@
       </p:sp>
       <p:sp>
         <p:nvSpPr>
-          <p:cNvPr id="68" name="Text 66"/>
+          <p:cNvPr id="83" name="Text 81"/>
           <p:cNvSpPr/>
           <p:nvPr/>
         </p:nvSpPr>
@@ -2908,11 +3253,28 @@
             </a:r>
             <a:endParaRPr lang="en-US" sz="650" dirty="0"/>
           </a:p>
-        </p:txBody>
-      </p:sp>
-      <p:sp>
-        <p:nvSpPr>
-          <p:cNvPr id="69" name="Shape 67"/>
+          <a:p>
+            <a:pPr indent="0" marL="0">
+              <a:buNone/>
+            </a:pPr>
+            <a:r>
+              <a:rPr lang="en-US" sz="650" dirty="0">
+                <a:solidFill>
+                  <a:srgbClr val="374151"/>
+                </a:solidFill>
+                <a:latin typeface="Yu Gothic" pitchFamily="34" charset="0"/>
+                <a:ea typeface="Yu Gothic" pitchFamily="34" charset="-122"/>
+                <a:cs typeface="Yu Gothic" pitchFamily="34" charset="-120"/>
+              </a:rPr>
+              <a:t>KyousoubaId, KishuId, KyuushaId（推定）</a:t>
+            </a:r>
+            <a:endParaRPr lang="en-US" sz="650" dirty="0"/>
+          </a:p>
+        </p:txBody>
+      </p:sp>
+      <p:sp>
+        <p:nvSpPr>
+          <p:cNvPr id="84" name="Shape 82"/>
           <p:cNvSpPr/>
           <p:nvPr/>
         </p:nvSpPr>
@@ -2937,7 +3299,7 @@
       </p:sp>
       <p:sp>
         <p:nvSpPr>
-          <p:cNvPr id="70" name="Shape 68"/>
+          <p:cNvPr id="85" name="Shape 83"/>
           <p:cNvSpPr/>
           <p:nvPr/>
         </p:nvSpPr>
@@ -2962,7 +3324,7 @@
       </p:sp>
       <p:sp>
         <p:nvSpPr>
-          <p:cNvPr id="71" name="Text 69"/>
+          <p:cNvPr id="86" name="Text 84"/>
           <p:cNvSpPr/>
           <p:nvPr/>
         </p:nvSpPr>
@@ -3001,7 +3363,7 @@
       </p:sp>
       <p:sp>
         <p:nvSpPr>
-          <p:cNvPr id="72" name="Text 70"/>
+          <p:cNvPr id="87" name="Text 85"/>
           <p:cNvSpPr/>
           <p:nvPr/>
         </p:nvSpPr>
@@ -3074,7 +3436,7 @@
       </p:sp>
       <p:sp>
         <p:nvSpPr>
-          <p:cNvPr id="73" name="Shape 71"/>
+          <p:cNvPr id="88" name="Shape 86"/>
           <p:cNvSpPr/>
           <p:nvPr/>
         </p:nvSpPr>
@@ -3099,7 +3461,7 @@
       </p:sp>
       <p:sp>
         <p:nvSpPr>
-          <p:cNvPr id="74" name="Shape 72"/>
+          <p:cNvPr id="89" name="Shape 87"/>
           <p:cNvSpPr/>
           <p:nvPr/>
         </p:nvSpPr>
@@ -3124,7 +3486,7 @@
       </p:sp>
       <p:sp>
         <p:nvSpPr>
-          <p:cNvPr id="75" name="Text 73"/>
+          <p:cNvPr id="90" name="Text 88"/>
           <p:cNvSpPr/>
           <p:nvPr/>
         </p:nvSpPr>
@@ -3163,7 +3525,7 @@
       </p:sp>
       <p:sp>
         <p:nvSpPr>
-          <p:cNvPr id="76" name="Text 74"/>
+          <p:cNvPr id="91" name="Text 89"/>
           <p:cNvSpPr/>
           <p:nvPr/>
         </p:nvSpPr>
@@ -3236,7 +3598,7 @@
       </p:sp>
       <p:sp>
         <p:nvSpPr>
-          <p:cNvPr id="77" name="Shape 75"/>
+          <p:cNvPr id="92" name="Shape 90"/>
           <p:cNvSpPr/>
           <p:nvPr/>
         </p:nvSpPr>
@@ -3261,7 +3623,7 @@
       </p:sp>
       <p:sp>
         <p:nvSpPr>
-          <p:cNvPr id="78" name="Shape 76"/>
+          <p:cNvPr id="93" name="Shape 91"/>
           <p:cNvSpPr/>
           <p:nvPr/>
         </p:nvSpPr>
@@ -3286,7 +3648,7 @@
       </p:sp>
       <p:sp>
         <p:nvSpPr>
-          <p:cNvPr id="79" name="Text 77"/>
+          <p:cNvPr id="94" name="Text 92"/>
           <p:cNvSpPr/>
           <p:nvPr/>
         </p:nvSpPr>
@@ -3325,7 +3687,7 @@
       </p:sp>
       <p:sp>
         <p:nvSpPr>
-          <p:cNvPr id="80" name="Text 78"/>
+          <p:cNvPr id="95" name="Text 93"/>
           <p:cNvSpPr/>
           <p:nvPr/>
         </p:nvSpPr>
@@ -3381,7 +3743,7 @@
       </p:sp>
       <p:sp>
         <p:nvSpPr>
-          <p:cNvPr id="81" name="Shape 79"/>
+          <p:cNvPr id="96" name="Shape 94"/>
           <p:cNvSpPr/>
           <p:nvPr/>
         </p:nvSpPr>
@@ -3406,7 +3768,7 @@
       </p:sp>
       <p:sp>
         <p:nvSpPr>
-          <p:cNvPr id="82" name="Shape 80"/>
+          <p:cNvPr id="97" name="Shape 95"/>
           <p:cNvSpPr/>
           <p:nvPr/>
         </p:nvSpPr>
@@ -3431,7 +3793,7 @@
       </p:sp>
       <p:sp>
         <p:nvSpPr>
-          <p:cNvPr id="83" name="Text 81"/>
+          <p:cNvPr id="98" name="Text 96"/>
           <p:cNvSpPr/>
           <p:nvPr/>
         </p:nvSpPr>
@@ -3470,7 +3832,7 @@
       </p:sp>
       <p:sp>
         <p:nvSpPr>
-          <p:cNvPr id="84" name="Text 82"/>
+          <p:cNvPr id="99" name="Text 97"/>
           <p:cNvSpPr/>
           <p:nvPr/>
         </p:nvSpPr>
@@ -3509,7 +3871,7 @@
       </p:sp>
       <p:sp>
         <p:nvSpPr>
-          <p:cNvPr id="85" name="Shape 83"/>
+          <p:cNvPr id="100" name="Shape 98"/>
           <p:cNvSpPr/>
           <p:nvPr/>
         </p:nvSpPr>
@@ -3534,7 +3896,7 @@
       </p:sp>
       <p:sp>
         <p:nvSpPr>
-          <p:cNvPr id="86" name="Shape 84"/>
+          <p:cNvPr id="101" name="Shape 99"/>
           <p:cNvSpPr/>
           <p:nvPr/>
         </p:nvSpPr>
@@ -3559,7 +3921,7 @@
       </p:sp>
       <p:sp>
         <p:nvSpPr>
-          <p:cNvPr id="87" name="Text 85"/>
+          <p:cNvPr id="102" name="Text 100"/>
           <p:cNvSpPr/>
           <p:nvPr/>
         </p:nvSpPr>
@@ -3598,7 +3960,7 @@
       </p:sp>
       <p:sp>
         <p:nvSpPr>
-          <p:cNvPr id="88" name="Text 86"/>
+          <p:cNvPr id="103" name="Text 101"/>
           <p:cNvSpPr/>
           <p:nvPr/>
         </p:nvSpPr>
@@ -3654,7 +4016,7 @@
       </p:sp>
       <p:sp>
         <p:nvSpPr>
-          <p:cNvPr id="89" name="Shape 87"/>
+          <p:cNvPr id="104" name="Shape 102"/>
           <p:cNvSpPr/>
           <p:nvPr/>
         </p:nvSpPr>
@@ -3679,7 +4041,7 @@
       </p:sp>
       <p:sp>
         <p:nvSpPr>
-          <p:cNvPr id="90" name="Shape 88"/>
+          <p:cNvPr id="105" name="Shape 103"/>
           <p:cNvSpPr/>
           <p:nvPr/>
         </p:nvSpPr>
@@ -3704,7 +4066,7 @@
       </p:sp>
       <p:sp>
         <p:nvSpPr>
-          <p:cNvPr id="91" name="Text 89"/>
+          <p:cNvPr id="106" name="Text 104"/>
           <p:cNvSpPr/>
           <p:nvPr/>
         </p:nvSpPr>
@@ -3743,7 +4105,7 @@
       </p:sp>
       <p:sp>
         <p:nvSpPr>
-          <p:cNvPr id="92" name="Text 90"/>
+          <p:cNvPr id="107" name="Text 105"/>
           <p:cNvSpPr/>
           <p:nvPr/>
         </p:nvSpPr>
@@ -3799,13 +4161,13 @@
       </p:sp>
       <p:sp>
         <p:nvSpPr>
-          <p:cNvPr id="93" name="Shape 91"/>
-          <p:cNvSpPr/>
-          <p:nvPr/>
-        </p:nvSpPr>
-        <p:spPr>
-          <a:xfrm>
-            <a:off x="182880" y="3474720"/>
+          <p:cNvPr id="108" name="Shape 106"/>
+          <p:cNvSpPr/>
+          <p:nvPr/>
+        </p:nvSpPr>
+        <p:spPr>
+          <a:xfrm>
+            <a:off x="182880" y="1737360"/>
             <a:ext cx="1280160" cy="566928"/>
           </a:xfrm>
           <a:prstGeom prst="rect">
@@ -3824,13 +4186,13 @@
       </p:sp>
       <p:sp>
         <p:nvSpPr>
-          <p:cNvPr id="94" name="Shape 92"/>
-          <p:cNvSpPr/>
-          <p:nvPr/>
-        </p:nvSpPr>
-        <p:spPr>
-          <a:xfrm>
-            <a:off x="182880" y="3474720"/>
+          <p:cNvPr id="109" name="Shape 107"/>
+          <p:cNvSpPr/>
+          <p:nvPr/>
+        </p:nvSpPr>
+        <p:spPr>
+          <a:xfrm>
+            <a:off x="182880" y="1737360"/>
             <a:ext cx="1280160" cy="201168"/>
           </a:xfrm>
           <a:prstGeom prst="rect">
@@ -3849,13 +4211,13 @@
       </p:sp>
       <p:sp>
         <p:nvSpPr>
-          <p:cNvPr id="95" name="Text 93"/>
-          <p:cNvSpPr/>
-          <p:nvPr/>
-        </p:nvSpPr>
-        <p:spPr>
-          <a:xfrm>
-            <a:off x="182880" y="3474720"/>
+          <p:cNvPr id="110" name="Text 108"/>
+          <p:cNvSpPr/>
+          <p:nvPr/>
+        </p:nvSpPr>
+        <p:spPr>
+          <a:xfrm>
+            <a:off x="182880" y="1737360"/>
             <a:ext cx="1280160" cy="201168"/>
           </a:xfrm>
           <a:prstGeom prst="rect">
@@ -3888,13 +4250,13 @@
       </p:sp>
       <p:sp>
         <p:nvSpPr>
-          <p:cNvPr id="96" name="Text 94"/>
-          <p:cNvSpPr/>
-          <p:nvPr/>
-        </p:nvSpPr>
-        <p:spPr>
-          <a:xfrm>
-            <a:off x="228600" y="3685032"/>
+          <p:cNvPr id="111" name="Text 109"/>
+          <p:cNvSpPr/>
+          <p:nvPr/>
+        </p:nvSpPr>
+        <p:spPr>
+          <a:xfrm>
+            <a:off x="228600" y="1947672"/>
             <a:ext cx="1188720" cy="347472"/>
           </a:xfrm>
           <a:prstGeom prst="rect">
@@ -3927,13 +4289,13 @@
       </p:sp>
       <p:sp>
         <p:nvSpPr>
-          <p:cNvPr id="97" name="Shape 95"/>
-          <p:cNvSpPr/>
-          <p:nvPr/>
-        </p:nvSpPr>
-        <p:spPr>
-          <a:xfrm>
-            <a:off x="1645920" y="3474720"/>
+          <p:cNvPr id="112" name="Shape 110"/>
+          <p:cNvSpPr/>
+          <p:nvPr/>
+        </p:nvSpPr>
+        <p:spPr>
+          <a:xfrm>
+            <a:off x="182880" y="2606040"/>
             <a:ext cx="1280160" cy="566928"/>
           </a:xfrm>
           <a:prstGeom prst="rect">
@@ -3952,13 +4314,13 @@
       </p:sp>
       <p:sp>
         <p:nvSpPr>
-          <p:cNvPr id="98" name="Shape 96"/>
-          <p:cNvSpPr/>
-          <p:nvPr/>
-        </p:nvSpPr>
-        <p:spPr>
-          <a:xfrm>
-            <a:off x="1645920" y="3474720"/>
+          <p:cNvPr id="113" name="Shape 111"/>
+          <p:cNvSpPr/>
+          <p:nvPr/>
+        </p:nvSpPr>
+        <p:spPr>
+          <a:xfrm>
+            <a:off x="182880" y="2606040"/>
             <a:ext cx="1280160" cy="201168"/>
           </a:xfrm>
           <a:prstGeom prst="rect">
@@ -3977,13 +4339,13 @@
       </p:sp>
       <p:sp>
         <p:nvSpPr>
-          <p:cNvPr id="99" name="Text 97"/>
-          <p:cNvSpPr/>
-          <p:nvPr/>
-        </p:nvSpPr>
-        <p:spPr>
-          <a:xfrm>
-            <a:off x="1645920" y="3474720"/>
+          <p:cNvPr id="114" name="Text 112"/>
+          <p:cNvSpPr/>
+          <p:nvPr/>
+        </p:nvSpPr>
+        <p:spPr>
+          <a:xfrm>
+            <a:off x="182880" y="2606040"/>
             <a:ext cx="1280160" cy="201168"/>
           </a:xfrm>
           <a:prstGeom prst="rect">
@@ -4016,13 +4378,13 @@
       </p:sp>
       <p:sp>
         <p:nvSpPr>
-          <p:cNvPr id="100" name="Text 98"/>
-          <p:cNvSpPr/>
-          <p:nvPr/>
-        </p:nvSpPr>
-        <p:spPr>
-          <a:xfrm>
-            <a:off x="1691640" y="3685032"/>
+          <p:cNvPr id="115" name="Text 113"/>
+          <p:cNvSpPr/>
+          <p:nvPr/>
+        </p:nvSpPr>
+        <p:spPr>
+          <a:xfrm>
+            <a:off x="228600" y="2816352"/>
             <a:ext cx="1188720" cy="347472"/>
           </a:xfrm>
           <a:prstGeom prst="rect">
@@ -4072,14 +4434,14 @@
       </p:sp>
       <p:sp>
         <p:nvSpPr>
-          <p:cNvPr id="101" name="Shape 99"/>
-          <p:cNvSpPr/>
-          <p:nvPr/>
-        </p:nvSpPr>
-        <p:spPr>
-          <a:xfrm>
-            <a:off x="3108960" y="3474720"/>
-            <a:ext cx="2743200" cy="566928"/>
+          <p:cNvPr id="116" name="Shape 114"/>
+          <p:cNvSpPr/>
+          <p:nvPr/>
+        </p:nvSpPr>
+        <p:spPr>
+          <a:xfrm>
+            <a:off x="182880" y="3474720"/>
+            <a:ext cx="1280160" cy="566928"/>
           </a:xfrm>
           <a:prstGeom prst="rect">
             <a:avLst/>
@@ -4089,6 +4451,296 @@
           </a:solidFill>
           <a:ln w="12700">
             <a:solidFill>
+              <a:srgbClr val="595959"/>
+            </a:solidFill>
+            <a:prstDash val="solid"/>
+          </a:ln>
+        </p:spPr>
+      </p:sp>
+      <p:sp>
+        <p:nvSpPr>
+          <p:cNvPr id="117" name="Shape 115"/>
+          <p:cNvSpPr/>
+          <p:nvPr/>
+        </p:nvSpPr>
+        <p:spPr>
+          <a:xfrm>
+            <a:off x="182880" y="3474720"/>
+            <a:ext cx="1280160" cy="201168"/>
+          </a:xfrm>
+          <a:prstGeom prst="rect">
+            <a:avLst/>
+          </a:prstGeom>
+          <a:solidFill>
+            <a:srgbClr val="595959"/>
+          </a:solidFill>
+          <a:ln w="12700">
+            <a:solidFill>
+              <a:srgbClr val="595959"/>
+            </a:solidFill>
+            <a:prstDash val="solid"/>
+          </a:ln>
+        </p:spPr>
+      </p:sp>
+      <p:sp>
+        <p:nvSpPr>
+          <p:cNvPr id="118" name="Text 116"/>
+          <p:cNvSpPr/>
+          <p:nvPr/>
+        </p:nvSpPr>
+        <p:spPr>
+          <a:xfrm>
+            <a:off x="182880" y="3474720"/>
+            <a:ext cx="1280160" cy="201168"/>
+          </a:xfrm>
+          <a:prstGeom prst="rect">
+            <a:avLst/>
+          </a:prstGeom>
+          <a:noFill/>
+          <a:ln/>
+        </p:spPr>
+        <p:txBody>
+          <a:bodyPr wrap="square" lIns="0" tIns="0" rIns="0" bIns="0" rtlCol="0" anchor="ctr"/>
+          <a:lstStyle/>
+          <a:p>
+            <a:pPr algn="ctr" indent="0" marL="0">
+              <a:buNone/>
+            </a:pPr>
+            <a:r>
+              <a:rPr lang="en-US" sz="800" b="1" dirty="0">
+                <a:solidFill>
+                  <a:srgbClr val="FFFFFF"/>
+                </a:solidFill>
+                <a:latin typeface="Yu Gothic" pitchFamily="34" charset="0"/>
+                <a:ea typeface="Yu Gothic" pitchFamily="34" charset="-122"/>
+                <a:cs typeface="Yu Gothic" pitchFamily="34" charset="-120"/>
+              </a:rPr>
+              <a:t>Japanize</a:t>
+            </a:r>
+            <a:endParaRPr lang="en-US" sz="800" dirty="0"/>
+          </a:p>
+        </p:txBody>
+      </p:sp>
+      <p:sp>
+        <p:nvSpPr>
+          <p:cNvPr id="119" name="Text 117"/>
+          <p:cNvSpPr/>
+          <p:nvPr/>
+        </p:nvSpPr>
+        <p:spPr>
+          <a:xfrm>
+            <a:off x="228600" y="3685032"/>
+            <a:ext cx="1188720" cy="347472"/>
+          </a:xfrm>
+          <a:prstGeom prst="rect">
+            <a:avLst/>
+          </a:prstGeom>
+          <a:noFill/>
+          <a:ln/>
+        </p:spPr>
+        <p:txBody>
+          <a:bodyPr wrap="square" lIns="0" tIns="0" rIns="0" bIns="0" rtlCol="0" anchor="t"/>
+          <a:lstStyle/>
+          <a:p>
+            <a:pPr indent="0" marL="0">
+              <a:buNone/>
+            </a:pPr>
+            <a:r>
+              <a:rPr lang="en-US" sz="650" dirty="0">
+                <a:solidFill>
+                  <a:srgbClr val="374151"/>
+                </a:solidFill>
+                <a:latin typeface="Yu Gothic" pitchFamily="34" charset="0"/>
+                <a:ea typeface="Yu Gothic" pitchFamily="34" charset="-122"/>
+                <a:cs typeface="Yu Gothic" pitchFamily="34" charset="-120"/>
+              </a:rPr>
+              <a:t>PK Id</a:t>
+            </a:r>
+            <a:endParaRPr lang="en-US" sz="650" dirty="0"/>
+          </a:p>
+          <a:p>
+            <a:pPr indent="0" marL="0">
+              <a:buNone/>
+            </a:pPr>
+            <a:r>
+              <a:rPr lang="en-US" sz="650" dirty="0">
+                <a:solidFill>
+                  <a:srgbClr val="374151"/>
+                </a:solidFill>
+                <a:latin typeface="Yu Gothic" pitchFamily="34" charset="0"/>
+                <a:ea typeface="Yu Gothic" pitchFamily="34" charset="-122"/>
+                <a:cs typeface="Yu Gothic" pitchFamily="34" charset="-120"/>
+              </a:rPr>
+              <a:t>Domain（推定→Code.Domain）</a:t>
+            </a:r>
+            <a:endParaRPr lang="en-US" sz="650" dirty="0"/>
+          </a:p>
+        </p:txBody>
+      </p:sp>
+      <p:sp>
+        <p:nvSpPr>
+          <p:cNvPr id="120" name="Shape 118"/>
+          <p:cNvSpPr/>
+          <p:nvPr/>
+        </p:nvSpPr>
+        <p:spPr>
+          <a:xfrm>
+            <a:off x="1645920" y="3474720"/>
+            <a:ext cx="1280160" cy="566928"/>
+          </a:xfrm>
+          <a:prstGeom prst="rect">
+            <a:avLst/>
+          </a:prstGeom>
+          <a:solidFill>
+            <a:srgbClr val="FFFFFF"/>
+          </a:solidFill>
+          <a:ln w="12700">
+            <a:solidFill>
+              <a:srgbClr val="595959"/>
+            </a:solidFill>
+            <a:prstDash val="solid"/>
+          </a:ln>
+        </p:spPr>
+      </p:sp>
+      <p:sp>
+        <p:nvSpPr>
+          <p:cNvPr id="121" name="Shape 119"/>
+          <p:cNvSpPr/>
+          <p:nvPr/>
+        </p:nvSpPr>
+        <p:spPr>
+          <a:xfrm>
+            <a:off x="1645920" y="3474720"/>
+            <a:ext cx="1280160" cy="201168"/>
+          </a:xfrm>
+          <a:prstGeom prst="rect">
+            <a:avLst/>
+          </a:prstGeom>
+          <a:solidFill>
+            <a:srgbClr val="595959"/>
+          </a:solidFill>
+          <a:ln w="12700">
+            <a:solidFill>
+              <a:srgbClr val="595959"/>
+            </a:solidFill>
+            <a:prstDash val="solid"/>
+          </a:ln>
+        </p:spPr>
+      </p:sp>
+      <p:sp>
+        <p:nvSpPr>
+          <p:cNvPr id="122" name="Text 120"/>
+          <p:cNvSpPr/>
+          <p:nvPr/>
+        </p:nvSpPr>
+        <p:spPr>
+          <a:xfrm>
+            <a:off x="1645920" y="3474720"/>
+            <a:ext cx="1280160" cy="201168"/>
+          </a:xfrm>
+          <a:prstGeom prst="rect">
+            <a:avLst/>
+          </a:prstGeom>
+          <a:noFill/>
+          <a:ln/>
+        </p:spPr>
+        <p:txBody>
+          <a:bodyPr wrap="square" lIns="0" tIns="0" rIns="0" bIns="0" rtlCol="0" anchor="ctr"/>
+          <a:lstStyle/>
+          <a:p>
+            <a:pPr algn="ctr" indent="0" marL="0">
+              <a:buNone/>
+            </a:pPr>
+            <a:r>
+              <a:rPr lang="en-US" sz="800" b="1" dirty="0">
+                <a:solidFill>
+                  <a:srgbClr val="FFFFFF"/>
+                </a:solidFill>
+                <a:latin typeface="Yu Gothic" pitchFamily="34" charset="0"/>
+                <a:ea typeface="Yu Gothic" pitchFamily="34" charset="-122"/>
+                <a:cs typeface="Yu Gothic" pitchFamily="34" charset="-120"/>
+              </a:rPr>
+              <a:t>Code</a:t>
+            </a:r>
+            <a:endParaRPr lang="en-US" sz="800" dirty="0"/>
+          </a:p>
+        </p:txBody>
+      </p:sp>
+      <p:sp>
+        <p:nvSpPr>
+          <p:cNvPr id="123" name="Text 121"/>
+          <p:cNvSpPr/>
+          <p:nvPr/>
+        </p:nvSpPr>
+        <p:spPr>
+          <a:xfrm>
+            <a:off x="1691640" y="3685032"/>
+            <a:ext cx="1188720" cy="347472"/>
+          </a:xfrm>
+          <a:prstGeom prst="rect">
+            <a:avLst/>
+          </a:prstGeom>
+          <a:noFill/>
+          <a:ln/>
+        </p:spPr>
+        <p:txBody>
+          <a:bodyPr wrap="square" lIns="0" tIns="0" rIns="0" bIns="0" rtlCol="0" anchor="t"/>
+          <a:lstStyle/>
+          <a:p>
+            <a:pPr indent="0" marL="0">
+              <a:buNone/>
+            </a:pPr>
+            <a:r>
+              <a:rPr lang="en-US" sz="650" dirty="0">
+                <a:solidFill>
+                  <a:srgbClr val="374151"/>
+                </a:solidFill>
+                <a:latin typeface="Yu Gothic" pitchFamily="34" charset="0"/>
+                <a:ea typeface="Yu Gothic" pitchFamily="34" charset="-122"/>
+                <a:cs typeface="Yu Gothic" pitchFamily="34" charset="-120"/>
+              </a:rPr>
+              <a:t>PK Domain, Key</a:t>
+            </a:r>
+            <a:endParaRPr lang="en-US" sz="650" dirty="0"/>
+          </a:p>
+          <a:p>
+            <a:pPr indent="0" marL="0">
+              <a:buNone/>
+            </a:pPr>
+            <a:r>
+              <a:rPr lang="en-US" sz="650" dirty="0">
+                <a:solidFill>
+                  <a:srgbClr val="374151"/>
+                </a:solidFill>
+                <a:latin typeface="Yu Gothic" pitchFamily="34" charset="0"/>
+                <a:ea typeface="Yu Gothic" pitchFamily="34" charset="-122"/>
+                <a:cs typeface="Yu Gothic" pitchFamily="34" charset="-120"/>
+              </a:rPr>
+              <a:t>コード値の定義</a:t>
+            </a:r>
+            <a:endParaRPr lang="en-US" sz="650" dirty="0"/>
+          </a:p>
+        </p:txBody>
+      </p:sp>
+      <p:sp>
+        <p:nvSpPr>
+          <p:cNvPr id="124" name="Shape 122"/>
+          <p:cNvSpPr/>
+          <p:nvPr/>
+        </p:nvSpPr>
+        <p:spPr>
+          <a:xfrm>
+            <a:off x="3108960" y="2606040"/>
+            <a:ext cx="1280160" cy="566928"/>
+          </a:xfrm>
+          <a:prstGeom prst="rect">
+            <a:avLst/>
+          </a:prstGeom>
+          <a:solidFill>
+            <a:srgbClr val="FFFFFF"/>
+          </a:solidFill>
+          <a:ln w="12700">
+            <a:solidFill>
               <a:srgbClr val="5B2C83"/>
             </a:solidFill>
             <a:prstDash val="solid"/>
@@ -4097,14 +4749,14 @@
       </p:sp>
       <p:sp>
         <p:nvSpPr>
-          <p:cNvPr id="102" name="Shape 100"/>
-          <p:cNvSpPr/>
-          <p:nvPr/>
-        </p:nvSpPr>
-        <p:spPr>
-          <a:xfrm>
-            <a:off x="3108960" y="3474720"/>
-            <a:ext cx="2743200" cy="201168"/>
+          <p:cNvPr id="125" name="Shape 123"/>
+          <p:cNvSpPr/>
+          <p:nvPr/>
+        </p:nvSpPr>
+        <p:spPr>
+          <a:xfrm>
+            <a:off x="3108960" y="2606040"/>
+            <a:ext cx="1280160" cy="201168"/>
           </a:xfrm>
           <a:prstGeom prst="rect">
             <a:avLst/>
@@ -4122,14 +4774,159 @@
       </p:sp>
       <p:sp>
         <p:nvSpPr>
-          <p:cNvPr id="103" name="Text 101"/>
+          <p:cNvPr id="126" name="Text 124"/>
+          <p:cNvSpPr/>
+          <p:nvPr/>
+        </p:nvSpPr>
+        <p:spPr>
+          <a:xfrm>
+            <a:off x="3108960" y="2606040"/>
+            <a:ext cx="1280160" cy="201168"/>
+          </a:xfrm>
+          <a:prstGeom prst="rect">
+            <a:avLst/>
+          </a:prstGeom>
+          <a:noFill/>
+          <a:ln/>
+        </p:spPr>
+        <p:txBody>
+          <a:bodyPr wrap="square" lIns="0" tIns="0" rIns="0" bIns="0" rtlCol="0" anchor="ctr"/>
+          <a:lstStyle/>
+          <a:p>
+            <a:pPr algn="ctr" indent="0" marL="0">
+              <a:buNone/>
+            </a:pPr>
+            <a:r>
+              <a:rPr lang="en-US" sz="800" b="1" dirty="0">
+                <a:solidFill>
+                  <a:srgbClr val="FFFFFF"/>
+                </a:solidFill>
+                <a:latin typeface="Yu Gothic" pitchFamily="34" charset="0"/>
+                <a:ea typeface="Yu Gothic" pitchFamily="34" charset="-122"/>
+                <a:cs typeface="Yu Gothic" pitchFamily="34" charset="-120"/>
+              </a:rPr>
+              <a:t>Kyousouba</a:t>
+            </a:r>
+            <a:endParaRPr lang="en-US" sz="800" dirty="0"/>
+          </a:p>
+        </p:txBody>
+      </p:sp>
+      <p:sp>
+        <p:nvSpPr>
+          <p:cNvPr id="127" name="Text 125"/>
+          <p:cNvSpPr/>
+          <p:nvPr/>
+        </p:nvSpPr>
+        <p:spPr>
+          <a:xfrm>
+            <a:off x="3154680" y="2816352"/>
+            <a:ext cx="1188720" cy="347472"/>
+          </a:xfrm>
+          <a:prstGeom prst="rect">
+            <a:avLst/>
+          </a:prstGeom>
+          <a:noFill/>
+          <a:ln/>
+        </p:spPr>
+        <p:txBody>
+          <a:bodyPr wrap="square" lIns="0" tIns="0" rIns="0" bIns="0" rtlCol="0" anchor="t"/>
+          <a:lstStyle/>
+          <a:p>
+            <a:pPr indent="0" marL="0">
+              <a:buNone/>
+            </a:pPr>
+            <a:r>
+              <a:rPr lang="en-US" sz="650" dirty="0">
+                <a:solidFill>
+                  <a:srgbClr val="374151"/>
+                </a:solidFill>
+                <a:latin typeface="Yu Gothic" pitchFamily="34" charset="0"/>
+                <a:ea typeface="Yu Gothic" pitchFamily="34" charset="-122"/>
+                <a:cs typeface="Yu Gothic" pitchFamily="34" charset="-120"/>
+              </a:rPr>
+              <a:t>PK Id (TEXT)</a:t>
+            </a:r>
+            <a:endParaRPr lang="en-US" sz="650" dirty="0"/>
+          </a:p>
+          <a:p>
+            <a:pPr indent="0" marL="0">
+              <a:buNone/>
+            </a:pPr>
+            <a:r>
+              <a:rPr lang="en-US" sz="650" dirty="0">
+                <a:solidFill>
+                  <a:srgbClr val="374151"/>
+                </a:solidFill>
+                <a:latin typeface="Yu Gothic" pitchFamily="34" charset="0"/>
+                <a:ea typeface="Yu Gothic" pitchFamily="34" charset="-122"/>
+                <a:cs typeface="Yu Gothic" pitchFamily="34" charset="-120"/>
+              </a:rPr>
+              <a:t>KyuushaId（推定）</a:t>
+            </a:r>
+            <a:endParaRPr lang="en-US" sz="650" dirty="0"/>
+          </a:p>
+        </p:txBody>
+      </p:sp>
+      <p:sp>
+        <p:nvSpPr>
+          <p:cNvPr id="128" name="Shape 126"/>
           <p:cNvSpPr/>
           <p:nvPr/>
         </p:nvSpPr>
         <p:spPr>
           <a:xfrm>
             <a:off x="3108960" y="3474720"/>
-            <a:ext cx="2743200" cy="201168"/>
+            <a:ext cx="1280160" cy="566928"/>
+          </a:xfrm>
+          <a:prstGeom prst="rect">
+            <a:avLst/>
+          </a:prstGeom>
+          <a:solidFill>
+            <a:srgbClr val="FFFFFF"/>
+          </a:solidFill>
+          <a:ln w="12700">
+            <a:solidFill>
+              <a:srgbClr val="5B2C83"/>
+            </a:solidFill>
+            <a:prstDash val="solid"/>
+          </a:ln>
+        </p:spPr>
+      </p:sp>
+      <p:sp>
+        <p:nvSpPr>
+          <p:cNvPr id="129" name="Shape 127"/>
+          <p:cNvSpPr/>
+          <p:nvPr/>
+        </p:nvSpPr>
+        <p:spPr>
+          <a:xfrm>
+            <a:off x="3108960" y="3474720"/>
+            <a:ext cx="1280160" cy="201168"/>
+          </a:xfrm>
+          <a:prstGeom prst="rect">
+            <a:avLst/>
+          </a:prstGeom>
+          <a:solidFill>
+            <a:srgbClr val="5B2C83"/>
+          </a:solidFill>
+          <a:ln w="12700">
+            <a:solidFill>
+              <a:srgbClr val="5B2C83"/>
+            </a:solidFill>
+            <a:prstDash val="solid"/>
+          </a:ln>
+        </p:spPr>
+      </p:sp>
+      <p:sp>
+        <p:nvSpPr>
+          <p:cNvPr id="130" name="Text 128"/>
+          <p:cNvSpPr/>
+          <p:nvPr/>
+        </p:nvSpPr>
+        <p:spPr>
+          <a:xfrm>
+            <a:off x="3108960" y="3474720"/>
+            <a:ext cx="1280160" cy="201168"/>
           </a:xfrm>
           <a:prstGeom prst="rect">
             <a:avLst/>
@@ -4153,7 +4950,7 @@
                 <a:ea typeface="Yu Gothic" pitchFamily="34" charset="-122"/>
                 <a:cs typeface="Yu Gothic" pitchFamily="34" charset="-120"/>
               </a:rPr>
-              <a:t>FK なしのテーブル</a:t>
+              <a:t>Kyuusha</a:t>
             </a:r>
             <a:endParaRPr lang="en-US" sz="800" dirty="0"/>
           </a:p>
@@ -4161,14 +4958,14 @@
       </p:sp>
       <p:sp>
         <p:nvSpPr>
-          <p:cNvPr id="104" name="Text 102"/>
+          <p:cNvPr id="131" name="Text 129"/>
           <p:cNvSpPr/>
           <p:nvPr/>
         </p:nvSpPr>
         <p:spPr>
           <a:xfrm>
             <a:off x="3154680" y="3685032"/>
-            <a:ext cx="2651760" cy="347472"/>
+            <a:ext cx="1188720" cy="347472"/>
           </a:xfrm>
           <a:prstGeom prst="rect">
             <a:avLst/>
@@ -4184,7 +4981,7 @@
               <a:buNone/>
             </a:pPr>
             <a:r>
-              <a:rPr lang="en-US" sz="700" dirty="0">
+              <a:rPr lang="en-US" sz="650" dirty="0">
                 <a:solidFill>
                   <a:srgbClr val="374151"/>
                 </a:solidFill>
@@ -4192,16 +4989,127 @@
                 <a:ea typeface="Yu Gothic" pitchFamily="34" charset="-122"/>
                 <a:cs typeface="Yu Gothic" pitchFamily="34" charset="-120"/>
               </a:rPr>
-              <a:t>Kishu / Kyuusha / Kyousouba（マスタ）</a:t>
-            </a:r>
-            <a:endParaRPr lang="en-US" sz="700" dirty="0"/>
-          </a:p>
+              <a:t>PK Id</a:t>
+            </a:r>
+            <a:endParaRPr lang="en-US" sz="650" dirty="0"/>
+          </a:p>
+        </p:txBody>
+      </p:sp>
+      <p:sp>
+        <p:nvSpPr>
+          <p:cNvPr id="132" name="Shape 130"/>
+          <p:cNvSpPr/>
+          <p:nvPr/>
+        </p:nvSpPr>
+        <p:spPr>
+          <a:xfrm>
+            <a:off x="4572000" y="3474720"/>
+            <a:ext cx="1280160" cy="566928"/>
+          </a:xfrm>
+          <a:prstGeom prst="rect">
+            <a:avLst/>
+          </a:prstGeom>
+          <a:solidFill>
+            <a:srgbClr val="FFFFFF"/>
+          </a:solidFill>
+          <a:ln w="12700">
+            <a:solidFill>
+              <a:srgbClr val="5B2C83"/>
+            </a:solidFill>
+            <a:prstDash val="solid"/>
+          </a:ln>
+        </p:spPr>
+      </p:sp>
+      <p:sp>
+        <p:nvSpPr>
+          <p:cNvPr id="133" name="Shape 131"/>
+          <p:cNvSpPr/>
+          <p:nvPr/>
+        </p:nvSpPr>
+        <p:spPr>
+          <a:xfrm>
+            <a:off x="4572000" y="3474720"/>
+            <a:ext cx="1280160" cy="201168"/>
+          </a:xfrm>
+          <a:prstGeom prst="rect">
+            <a:avLst/>
+          </a:prstGeom>
+          <a:solidFill>
+            <a:srgbClr val="5B2C83"/>
+          </a:solidFill>
+          <a:ln w="12700">
+            <a:solidFill>
+              <a:srgbClr val="5B2C83"/>
+            </a:solidFill>
+            <a:prstDash val="solid"/>
+          </a:ln>
+        </p:spPr>
+      </p:sp>
+      <p:sp>
+        <p:nvSpPr>
+          <p:cNvPr id="134" name="Text 132"/>
+          <p:cNvSpPr/>
+          <p:nvPr/>
+        </p:nvSpPr>
+        <p:spPr>
+          <a:xfrm>
+            <a:off x="4572000" y="3474720"/>
+            <a:ext cx="1280160" cy="201168"/>
+          </a:xfrm>
+          <a:prstGeom prst="rect">
+            <a:avLst/>
+          </a:prstGeom>
+          <a:noFill/>
+          <a:ln/>
+        </p:spPr>
+        <p:txBody>
+          <a:bodyPr wrap="square" lIns="0" tIns="0" rIns="0" bIns="0" rtlCol="0" anchor="ctr"/>
+          <a:lstStyle/>
+          <a:p>
+            <a:pPr algn="ctr" indent="0" marL="0">
+              <a:buNone/>
+            </a:pPr>
+            <a:r>
+              <a:rPr lang="en-US" sz="800" b="1" dirty="0">
+                <a:solidFill>
+                  <a:srgbClr val="FFFFFF"/>
+                </a:solidFill>
+                <a:latin typeface="Yu Gothic" pitchFamily="34" charset="0"/>
+                <a:ea typeface="Yu Gothic" pitchFamily="34" charset="-122"/>
+                <a:cs typeface="Yu Gothic" pitchFamily="34" charset="-120"/>
+              </a:rPr>
+              <a:t>Kishu</a:t>
+            </a:r>
+            <a:endParaRPr lang="en-US" sz="800" dirty="0"/>
+          </a:p>
+        </p:txBody>
+      </p:sp>
+      <p:sp>
+        <p:nvSpPr>
+          <p:cNvPr id="135" name="Text 133"/>
+          <p:cNvSpPr/>
+          <p:nvPr/>
+        </p:nvSpPr>
+        <p:spPr>
+          <a:xfrm>
+            <a:off x="4617720" y="3685032"/>
+            <a:ext cx="1188720" cy="347472"/>
+          </a:xfrm>
+          <a:prstGeom prst="rect">
+            <a:avLst/>
+          </a:prstGeom>
+          <a:noFill/>
+          <a:ln/>
+        </p:spPr>
+        <p:txBody>
+          <a:bodyPr wrap="square" lIns="0" tIns="0" rIns="0" bIns="0" rtlCol="0" anchor="t"/>
+          <a:lstStyle/>
           <a:p>
             <a:pPr indent="0" marL="0">
               <a:buNone/>
             </a:pPr>
             <a:r>
-              <a:rPr lang="en-US" sz="700" dirty="0">
+              <a:rPr lang="en-US" sz="650" dirty="0">
                 <a:solidFill>
                   <a:srgbClr val="374151"/>
                 </a:solidFill>
@@ -4209,15 +5117,177 @@
                 <a:ea typeface="Yu Gothic" pitchFamily="34" charset="-122"/>
                 <a:cs typeface="Yu Gothic" pitchFamily="34" charset="-120"/>
               </a:rPr>
-              <a:t>Code / Japanize / UserSQL（補助）</a:t>
-            </a:r>
-            <a:endParaRPr lang="en-US" sz="700" dirty="0"/>
-          </a:p>
-        </p:txBody>
-      </p:sp>
-      <p:sp>
-        <p:nvSpPr>
-          <p:cNvPr id="105" name="Text 103"/>
+              <a:t>PK Id</a:t>
+            </a:r>
+            <a:endParaRPr lang="en-US" sz="650" dirty="0"/>
+          </a:p>
+          <a:p>
+            <a:pPr indent="0" marL="0">
+              <a:buNone/>
+            </a:pPr>
+            <a:r>
+              <a:rPr lang="en-US" sz="650" dirty="0">
+                <a:solidFill>
+                  <a:srgbClr val="374151"/>
+                </a:solidFill>
+                <a:latin typeface="Yu Gothic" pitchFamily="34" charset="0"/>
+                <a:ea typeface="Yu Gothic" pitchFamily="34" charset="-122"/>
+                <a:cs typeface="Yu Gothic" pitchFamily="34" charset="-120"/>
+              </a:rPr>
+              <a:t>KishuShozokuKyuushaId（推定）</a:t>
+            </a:r>
+            <a:endParaRPr lang="en-US" sz="650" dirty="0"/>
+          </a:p>
+        </p:txBody>
+      </p:sp>
+      <p:sp>
+        <p:nvSpPr>
+          <p:cNvPr id="136" name="Shape 134"/>
+          <p:cNvSpPr/>
+          <p:nvPr/>
+        </p:nvSpPr>
+        <p:spPr>
+          <a:xfrm>
+            <a:off x="6035040" y="3474720"/>
+            <a:ext cx="1280160" cy="566928"/>
+          </a:xfrm>
+          <a:prstGeom prst="rect">
+            <a:avLst/>
+          </a:prstGeom>
+          <a:solidFill>
+            <a:srgbClr val="FFFFFF"/>
+          </a:solidFill>
+          <a:ln w="12700">
+            <a:solidFill>
+              <a:srgbClr val="595959"/>
+            </a:solidFill>
+            <a:prstDash val="solid"/>
+          </a:ln>
+        </p:spPr>
+      </p:sp>
+      <p:sp>
+        <p:nvSpPr>
+          <p:cNvPr id="137" name="Shape 135"/>
+          <p:cNvSpPr/>
+          <p:nvPr/>
+        </p:nvSpPr>
+        <p:spPr>
+          <a:xfrm>
+            <a:off x="6035040" y="3474720"/>
+            <a:ext cx="1280160" cy="201168"/>
+          </a:xfrm>
+          <a:prstGeom prst="rect">
+            <a:avLst/>
+          </a:prstGeom>
+          <a:solidFill>
+            <a:srgbClr val="595959"/>
+          </a:solidFill>
+          <a:ln w="12700">
+            <a:solidFill>
+              <a:srgbClr val="595959"/>
+            </a:solidFill>
+            <a:prstDash val="solid"/>
+          </a:ln>
+        </p:spPr>
+      </p:sp>
+      <p:sp>
+        <p:nvSpPr>
+          <p:cNvPr id="138" name="Text 136"/>
+          <p:cNvSpPr/>
+          <p:nvPr/>
+        </p:nvSpPr>
+        <p:spPr>
+          <a:xfrm>
+            <a:off x="6035040" y="3474720"/>
+            <a:ext cx="1280160" cy="201168"/>
+          </a:xfrm>
+          <a:prstGeom prst="rect">
+            <a:avLst/>
+          </a:prstGeom>
+          <a:noFill/>
+          <a:ln/>
+        </p:spPr>
+        <p:txBody>
+          <a:bodyPr wrap="square" lIns="0" tIns="0" rIns="0" bIns="0" rtlCol="0" anchor="ctr"/>
+          <a:lstStyle/>
+          <a:p>
+            <a:pPr algn="ctr" indent="0" marL="0">
+              <a:buNone/>
+            </a:pPr>
+            <a:r>
+              <a:rPr lang="en-US" sz="800" b="1" dirty="0">
+                <a:solidFill>
+                  <a:srgbClr val="FFFFFF"/>
+                </a:solidFill>
+                <a:latin typeface="Yu Gothic" pitchFamily="34" charset="0"/>
+                <a:ea typeface="Yu Gothic" pitchFamily="34" charset="-122"/>
+                <a:cs typeface="Yu Gothic" pitchFamily="34" charset="-120"/>
+              </a:rPr>
+              <a:t>UserSQL</a:t>
+            </a:r>
+            <a:endParaRPr lang="en-US" sz="800" dirty="0"/>
+          </a:p>
+        </p:txBody>
+      </p:sp>
+      <p:sp>
+        <p:nvSpPr>
+          <p:cNvPr id="139" name="Text 137"/>
+          <p:cNvSpPr/>
+          <p:nvPr/>
+        </p:nvSpPr>
+        <p:spPr>
+          <a:xfrm>
+            <a:off x="6080760" y="3685032"/>
+            <a:ext cx="1188720" cy="347472"/>
+          </a:xfrm>
+          <a:prstGeom prst="rect">
+            <a:avLst/>
+          </a:prstGeom>
+          <a:noFill/>
+          <a:ln/>
+        </p:spPr>
+        <p:txBody>
+          <a:bodyPr wrap="square" lIns="0" tIns="0" rIns="0" bIns="0" rtlCol="0" anchor="t"/>
+          <a:lstStyle/>
+          <a:p>
+            <a:pPr indent="0" marL="0">
+              <a:buNone/>
+            </a:pPr>
+            <a:r>
+              <a:rPr lang="en-US" sz="650" dirty="0">
+                <a:solidFill>
+                  <a:srgbClr val="374151"/>
+                </a:solidFill>
+                <a:latin typeface="Yu Gothic" pitchFamily="34" charset="0"/>
+                <a:ea typeface="Yu Gothic" pitchFamily="34" charset="-122"/>
+                <a:cs typeface="Yu Gothic" pitchFamily="34" charset="-120"/>
+              </a:rPr>
+              <a:t>PK Domain, Name</a:t>
+            </a:r>
+            <a:endParaRPr lang="en-US" sz="650" dirty="0"/>
+          </a:p>
+          <a:p>
+            <a:pPr indent="0" marL="0">
+              <a:buNone/>
+            </a:pPr>
+            <a:r>
+              <a:rPr lang="en-US" sz="650" dirty="0">
+                <a:solidFill>
+                  <a:srgbClr val="374151"/>
+                </a:solidFill>
+                <a:latin typeface="Yu Gothic" pitchFamily="34" charset="0"/>
+                <a:ea typeface="Yu Gothic" pitchFamily="34" charset="-122"/>
+                <a:cs typeface="Yu Gothic" pitchFamily="34" charset="-120"/>
+              </a:rPr>
+              <a:t>インポート後に実行するSQL</a:t>
+            </a:r>
+            <a:endParaRPr lang="en-US" sz="650" dirty="0"/>
+          </a:p>
+        </p:txBody>
+      </p:sp>
+      <p:sp>
+        <p:nvSpPr>
+          <p:cNvPr id="140" name="Text 138"/>
           <p:cNvSpPr/>
           <p:nvPr/>
         </p:nvSpPr>
@@ -4256,7 +5326,7 @@
       </p:sp>
       <p:sp>
         <p:nvSpPr>
-          <p:cNvPr id="106" name="Text 104"/>
+          <p:cNvPr id="141" name="Text 139"/>
           <p:cNvSpPr/>
           <p:nvPr/>
         </p:nvSpPr>
@@ -4295,7 +5365,7 @@
       </p:sp>
       <p:sp>
         <p:nvSpPr>
-          <p:cNvPr id="107" name="Text 105"/>
+          <p:cNvPr id="142" name="Text 140"/>
           <p:cNvSpPr/>
           <p:nvPr/>
         </p:nvSpPr>
@@ -4334,7 +5404,7 @@
       </p:sp>
       <p:sp>
         <p:nvSpPr>
-          <p:cNvPr id="108" name="Text 106"/>
+          <p:cNvPr id="143" name="Text 141"/>
           <p:cNvSpPr/>
           <p:nvPr/>
         </p:nvSpPr>
@@ -4373,7 +5443,7 @@
       </p:sp>
       <p:sp>
         <p:nvSpPr>
-          <p:cNvPr id="109" name="Text 107"/>
+          <p:cNvPr id="144" name="Text 142"/>
           <p:cNvSpPr/>
           <p:nvPr/>
         </p:nvSpPr>
@@ -4412,7 +5482,7 @@
       </p:sp>
       <p:sp>
         <p:nvSpPr>
-          <p:cNvPr id="110" name="Text 108"/>
+          <p:cNvPr id="145" name="Text 143"/>
           <p:cNvSpPr/>
           <p:nvPr/>
         </p:nvSpPr>
@@ -4451,7 +5521,7 @@
       </p:sp>
       <p:sp>
         <p:nvSpPr>
-          <p:cNvPr id="111" name="Text 109"/>
+          <p:cNvPr id="146" name="Text 144"/>
           <p:cNvSpPr/>
           <p:nvPr/>
         </p:nvSpPr>
@@ -4490,7 +5560,7 @@
       </p:sp>
       <p:sp>
         <p:nvSpPr>
-          <p:cNvPr id="112" name="Text 110"/>
+          <p:cNvPr id="147" name="Text 145"/>
           <p:cNvSpPr/>
           <p:nvPr/>
         </p:nvSpPr>
@@ -4529,7 +5599,7 @@
       </p:sp>
       <p:sp>
         <p:nvSpPr>
-          <p:cNvPr id="113" name="Text 111"/>
+          <p:cNvPr id="148" name="Text 146"/>
           <p:cNvSpPr/>
           <p:nvPr/>
         </p:nvSpPr>
@@ -4568,7 +5638,7 @@
       </p:sp>
       <p:sp>
         <p:nvSpPr>
-          <p:cNvPr id="114" name="Text 112"/>
+          <p:cNvPr id="149" name="Text 147"/>
           <p:cNvSpPr/>
           <p:nvPr/>
         </p:nvSpPr>
@@ -4607,7 +5677,7 @@
       </p:sp>
       <p:sp>
         <p:nvSpPr>
-          <p:cNvPr id="115" name="Text 113"/>
+          <p:cNvPr id="150" name="Text 148"/>
           <p:cNvSpPr/>
           <p:nvPr/>
         </p:nvSpPr>
@@ -4646,7 +5716,7 @@
       </p:sp>
       <p:sp>
         <p:nvSpPr>
-          <p:cNvPr id="116" name="Text 114"/>
+          <p:cNvPr id="151" name="Text 149"/>
           <p:cNvSpPr/>
           <p:nvPr/>
         </p:nvSpPr>
@@ -4685,7 +5755,7 @@
       </p:sp>
       <p:sp>
         <p:nvSpPr>
-          <p:cNvPr id="117" name="Text 115"/>
+          <p:cNvPr id="152" name="Text 150"/>
           <p:cNvSpPr/>
           <p:nvPr/>
         </p:nvSpPr>
@@ -4724,7 +5794,7 @@
       </p:sp>
       <p:sp>
         <p:nvSpPr>
-          <p:cNvPr id="118" name="Text 116"/>
+          <p:cNvPr id="153" name="Text 151"/>
           <p:cNvSpPr/>
           <p:nvPr/>
         </p:nvSpPr>
@@ -4763,7 +5833,7 @@
       </p:sp>
       <p:sp>
         <p:nvSpPr>
-          <p:cNvPr id="119" name="Text 117"/>
+          <p:cNvPr id="154" name="Text 152"/>
           <p:cNvSpPr/>
           <p:nvPr/>
         </p:nvSpPr>
@@ -4802,7 +5872,7 @@
       </p:sp>
       <p:sp>
         <p:nvSpPr>
-          <p:cNvPr id="120" name="Text 118"/>
+          <p:cNvPr id="155" name="Text 153"/>
           <p:cNvSpPr/>
           <p:nvPr/>
         </p:nvSpPr>
@@ -4841,7 +5911,7 @@
       </p:sp>
       <p:sp>
         <p:nvSpPr>
-          <p:cNvPr id="121" name="Text 119"/>
+          <p:cNvPr id="156" name="Text 154"/>
           <p:cNvSpPr/>
           <p:nvPr/>
         </p:nvSpPr>
@@ -4880,7 +5950,7 @@
       </p:sp>
       <p:sp>
         <p:nvSpPr>
-          <p:cNvPr id="122" name="Text 120"/>
+          <p:cNvPr id="157" name="Text 155"/>
           <p:cNvSpPr/>
           <p:nvPr/>
         </p:nvSpPr>
@@ -4919,7 +5989,7 @@
       </p:sp>
       <p:sp>
         <p:nvSpPr>
-          <p:cNvPr id="123" name="Text 121"/>
+          <p:cNvPr id="158" name="Text 156"/>
           <p:cNvSpPr/>
           <p:nvPr/>
         </p:nvSpPr>
@@ -4958,7 +6028,7 @@
       </p:sp>
       <p:sp>
         <p:nvSpPr>
-          <p:cNvPr id="124" name="Text 122"/>
+          <p:cNvPr id="159" name="Text 157"/>
           <p:cNvSpPr/>
           <p:nvPr/>
         </p:nvSpPr>
@@ -4997,7 +6067,7 @@
       </p:sp>
       <p:sp>
         <p:nvSpPr>
-          <p:cNvPr id="125" name="Text 123"/>
+          <p:cNvPr id="160" name="Text 158"/>
           <p:cNvSpPr/>
           <p:nvPr/>
         </p:nvSpPr>
@@ -5036,7 +6106,7 @@
       </p:sp>
       <p:sp>
         <p:nvSpPr>
-          <p:cNvPr id="126" name="Text 124"/>
+          <p:cNvPr id="161" name="Text 159"/>
           <p:cNvSpPr/>
           <p:nvPr/>
         </p:nvSpPr>
@@ -5075,7 +6145,7 @@
       </p:sp>
       <p:sp>
         <p:nvSpPr>
-          <p:cNvPr id="127" name="Text 125"/>
+          <p:cNvPr id="162" name="Text 160"/>
           <p:cNvSpPr/>
           <p:nvPr/>
         </p:nvSpPr>
@@ -5114,7 +6184,7 @@
       </p:sp>
       <p:sp>
         <p:nvSpPr>
-          <p:cNvPr id="128" name="Text 126"/>
+          <p:cNvPr id="163" name="Text 161"/>
           <p:cNvSpPr/>
           <p:nvPr/>
         </p:nvSpPr>
@@ -5153,7 +6223,7 @@
       </p:sp>
       <p:sp>
         <p:nvSpPr>
-          <p:cNvPr id="129" name="Text 127"/>
+          <p:cNvPr id="164" name="Text 162"/>
           <p:cNvSpPr/>
           <p:nvPr/>
         </p:nvSpPr>
@@ -5192,7 +6262,7 @@
       </p:sp>
       <p:sp>
         <p:nvSpPr>
-          <p:cNvPr id="130" name="Text 128"/>
+          <p:cNvPr id="165" name="Text 163"/>
           <p:cNvSpPr/>
           <p:nvPr/>
         </p:nvSpPr>
@@ -5231,7 +6301,7 @@
       </p:sp>
       <p:sp>
         <p:nvSpPr>
-          <p:cNvPr id="131" name="Text 129"/>
+          <p:cNvPr id="166" name="Text 164"/>
           <p:cNvSpPr/>
           <p:nvPr/>
         </p:nvSpPr>
@@ -5270,7 +6340,7 @@
       </p:sp>
       <p:sp>
         <p:nvSpPr>
-          <p:cNvPr id="132" name="Text 130"/>
+          <p:cNvPr id="167" name="Text 165"/>
           <p:cNvSpPr/>
           <p:nvPr/>
         </p:nvSpPr>
@@ -5309,7 +6379,7 @@
       </p:sp>
       <p:sp>
         <p:nvSpPr>
-          <p:cNvPr id="133" name="Text 131"/>
+          <p:cNvPr id="168" name="Text 166"/>
           <p:cNvSpPr/>
           <p:nvPr/>
         </p:nvSpPr>
@@ -5348,7 +6418,7 @@
       </p:sp>
       <p:sp>
         <p:nvSpPr>
-          <p:cNvPr id="134" name="Text 132"/>
+          <p:cNvPr id="169" name="Text 167"/>
           <p:cNvSpPr/>
           <p:nvPr/>
         </p:nvSpPr>
@@ -5387,13 +6457,13 @@
       </p:sp>
       <p:sp>
         <p:nvSpPr>
-          <p:cNvPr id="135" name="Text 133"/>
-          <p:cNvSpPr/>
-          <p:nvPr/>
-        </p:nvSpPr>
-        <p:spPr>
-          <a:xfrm>
-            <a:off x="1463040" y="3611880"/>
+          <p:cNvPr id="170" name="Text 168"/>
+          <p:cNvSpPr/>
+          <p:nvPr/>
+        </p:nvSpPr>
+        <p:spPr>
+          <a:xfrm>
+            <a:off x="868680" y="2322576"/>
             <a:ext cx="91440" cy="128016"/>
           </a:xfrm>
           <a:prstGeom prst="rect">
@@ -5426,7 +6496,436 @@
       </p:sp>
       <p:sp>
         <p:nvSpPr>
-          <p:cNvPr id="136" name="Text 134"/>
+          <p:cNvPr id="171" name="Text 169"/>
+          <p:cNvSpPr/>
+          <p:nvPr/>
+        </p:nvSpPr>
+        <p:spPr>
+          <a:xfrm>
+            <a:off x="868680" y="2459736"/>
+            <a:ext cx="91440" cy="128016"/>
+          </a:xfrm>
+          <a:prstGeom prst="rect">
+            <a:avLst/>
+          </a:prstGeom>
+          <a:noFill/>
+          <a:ln/>
+        </p:spPr>
+        <p:txBody>
+          <a:bodyPr wrap="square" lIns="0" tIns="0" rIns="0" bIns="0" rtlCol="0" anchor="ctr"/>
+          <a:lstStyle/>
+          <a:p>
+            <a:pPr algn="ctr" indent="0" marL="0">
+              <a:buNone/>
+            </a:pPr>
+            <a:r>
+              <a:rPr lang="en-US" sz="650" b="1" dirty="0">
+                <a:solidFill>
+                  <a:srgbClr val="B91C1C"/>
+                </a:solidFill>
+                <a:latin typeface="Yu Gothic" pitchFamily="34" charset="0"/>
+                <a:ea typeface="Yu Gothic" pitchFamily="34" charset="-122"/>
+                <a:cs typeface="Yu Gothic" pitchFamily="34" charset="-120"/>
+              </a:rPr>
+              <a:t>N</a:t>
+            </a:r>
+            <a:endParaRPr lang="en-US" sz="650" dirty="0"/>
+          </a:p>
+        </p:txBody>
+      </p:sp>
+      <p:sp>
+        <p:nvSpPr>
+          <p:cNvPr id="172" name="Text 170"/>
+          <p:cNvSpPr/>
+          <p:nvPr/>
+        </p:nvSpPr>
+        <p:spPr>
+          <a:xfrm>
+            <a:off x="4389120" y="2743200"/>
+            <a:ext cx="91440" cy="128016"/>
+          </a:xfrm>
+          <a:prstGeom prst="rect">
+            <a:avLst/>
+          </a:prstGeom>
+          <a:noFill/>
+          <a:ln/>
+        </p:spPr>
+        <p:txBody>
+          <a:bodyPr wrap="square" lIns="0" tIns="0" rIns="0" bIns="0" rtlCol="0" anchor="ctr"/>
+          <a:lstStyle/>
+          <a:p>
+            <a:pPr algn="ctr" indent="0" marL="0">
+              <a:buNone/>
+            </a:pPr>
+            <a:r>
+              <a:rPr lang="en-US" sz="650" b="1" dirty="0">
+                <a:solidFill>
+                  <a:srgbClr val="B91C1C"/>
+                </a:solidFill>
+                <a:latin typeface="Yu Gothic" pitchFamily="34" charset="0"/>
+                <a:ea typeface="Yu Gothic" pitchFamily="34" charset="-122"/>
+                <a:cs typeface="Yu Gothic" pitchFamily="34" charset="-120"/>
+              </a:rPr>
+              <a:t>1</a:t>
+            </a:r>
+            <a:endParaRPr lang="en-US" sz="650" dirty="0"/>
+          </a:p>
+        </p:txBody>
+      </p:sp>
+      <p:sp>
+        <p:nvSpPr>
+          <p:cNvPr id="173" name="Text 171"/>
+          <p:cNvSpPr/>
+          <p:nvPr/>
+        </p:nvSpPr>
+        <p:spPr>
+          <a:xfrm>
+            <a:off x="5943600" y="1965960"/>
+            <a:ext cx="91440" cy="128016"/>
+          </a:xfrm>
+          <a:prstGeom prst="rect">
+            <a:avLst/>
+          </a:prstGeom>
+          <a:noFill/>
+          <a:ln/>
+        </p:spPr>
+        <p:txBody>
+          <a:bodyPr wrap="square" lIns="0" tIns="0" rIns="0" bIns="0" rtlCol="0" anchor="ctr"/>
+          <a:lstStyle/>
+          <a:p>
+            <a:pPr algn="ctr" indent="0" marL="0">
+              <a:buNone/>
+            </a:pPr>
+            <a:r>
+              <a:rPr lang="en-US" sz="650" b="1" dirty="0">
+                <a:solidFill>
+                  <a:srgbClr val="B91C1C"/>
+                </a:solidFill>
+                <a:latin typeface="Yu Gothic" pitchFamily="34" charset="0"/>
+                <a:ea typeface="Yu Gothic" pitchFamily="34" charset="-122"/>
+                <a:cs typeface="Yu Gothic" pitchFamily="34" charset="-120"/>
+              </a:rPr>
+              <a:t>N</a:t>
+            </a:r>
+            <a:endParaRPr lang="en-US" sz="650" dirty="0"/>
+          </a:p>
+        </p:txBody>
+      </p:sp>
+      <p:sp>
+        <p:nvSpPr>
+          <p:cNvPr id="174" name="Text 172"/>
+          <p:cNvSpPr/>
+          <p:nvPr/>
+        </p:nvSpPr>
+        <p:spPr>
+          <a:xfrm>
+            <a:off x="5852160" y="3611880"/>
+            <a:ext cx="91440" cy="128016"/>
+          </a:xfrm>
+          <a:prstGeom prst="rect">
+            <a:avLst/>
+          </a:prstGeom>
+          <a:noFill/>
+          <a:ln/>
+        </p:spPr>
+        <p:txBody>
+          <a:bodyPr wrap="square" lIns="0" tIns="0" rIns="0" bIns="0" rtlCol="0" anchor="ctr"/>
+          <a:lstStyle/>
+          <a:p>
+            <a:pPr algn="ctr" indent="0" marL="0">
+              <a:buNone/>
+            </a:pPr>
+            <a:r>
+              <a:rPr lang="en-US" sz="650" b="1" dirty="0">
+                <a:solidFill>
+                  <a:srgbClr val="B91C1C"/>
+                </a:solidFill>
+                <a:latin typeface="Yu Gothic" pitchFamily="34" charset="0"/>
+                <a:ea typeface="Yu Gothic" pitchFamily="34" charset="-122"/>
+                <a:cs typeface="Yu Gothic" pitchFamily="34" charset="-120"/>
+              </a:rPr>
+              <a:t>1</a:t>
+            </a:r>
+            <a:endParaRPr lang="en-US" sz="650" dirty="0"/>
+          </a:p>
+        </p:txBody>
+      </p:sp>
+      <p:sp>
+        <p:nvSpPr>
+          <p:cNvPr id="175" name="Text 173"/>
+          <p:cNvSpPr/>
+          <p:nvPr/>
+        </p:nvSpPr>
+        <p:spPr>
+          <a:xfrm>
+            <a:off x="5943600" y="2029968"/>
+            <a:ext cx="91440" cy="128016"/>
+          </a:xfrm>
+          <a:prstGeom prst="rect">
+            <a:avLst/>
+          </a:prstGeom>
+          <a:noFill/>
+          <a:ln/>
+        </p:spPr>
+        <p:txBody>
+          <a:bodyPr wrap="square" lIns="0" tIns="0" rIns="0" bIns="0" rtlCol="0" anchor="ctr"/>
+          <a:lstStyle/>
+          <a:p>
+            <a:pPr algn="ctr" indent="0" marL="0">
+              <a:buNone/>
+            </a:pPr>
+            <a:r>
+              <a:rPr lang="en-US" sz="650" b="1" dirty="0">
+                <a:solidFill>
+                  <a:srgbClr val="B91C1C"/>
+                </a:solidFill>
+                <a:latin typeface="Yu Gothic" pitchFamily="34" charset="0"/>
+                <a:ea typeface="Yu Gothic" pitchFamily="34" charset="-122"/>
+                <a:cs typeface="Yu Gothic" pitchFamily="34" charset="-120"/>
+              </a:rPr>
+              <a:t>N</a:t>
+            </a:r>
+            <a:endParaRPr lang="en-US" sz="650" dirty="0"/>
+          </a:p>
+        </p:txBody>
+      </p:sp>
+      <p:sp>
+        <p:nvSpPr>
+          <p:cNvPr id="176" name="Text 174"/>
+          <p:cNvSpPr/>
+          <p:nvPr/>
+        </p:nvSpPr>
+        <p:spPr>
+          <a:xfrm>
+            <a:off x="4389120" y="3611880"/>
+            <a:ext cx="91440" cy="128016"/>
+          </a:xfrm>
+          <a:prstGeom prst="rect">
+            <a:avLst/>
+          </a:prstGeom>
+          <a:noFill/>
+          <a:ln/>
+        </p:spPr>
+        <p:txBody>
+          <a:bodyPr wrap="square" lIns="0" tIns="0" rIns="0" bIns="0" rtlCol="0" anchor="ctr"/>
+          <a:lstStyle/>
+          <a:p>
+            <a:pPr algn="ctr" indent="0" marL="0">
+              <a:buNone/>
+            </a:pPr>
+            <a:r>
+              <a:rPr lang="en-US" sz="650" b="1" dirty="0">
+                <a:solidFill>
+                  <a:srgbClr val="B91C1C"/>
+                </a:solidFill>
+                <a:latin typeface="Yu Gothic" pitchFamily="34" charset="0"/>
+                <a:ea typeface="Yu Gothic" pitchFamily="34" charset="-122"/>
+                <a:cs typeface="Yu Gothic" pitchFamily="34" charset="-120"/>
+              </a:rPr>
+              <a:t>1</a:t>
+            </a:r>
+            <a:endParaRPr lang="en-US" sz="650" dirty="0"/>
+          </a:p>
+        </p:txBody>
+      </p:sp>
+      <p:sp>
+        <p:nvSpPr>
+          <p:cNvPr id="177" name="Text 175"/>
+          <p:cNvSpPr/>
+          <p:nvPr/>
+        </p:nvSpPr>
+        <p:spPr>
+          <a:xfrm>
+            <a:off x="5943600" y="2093976"/>
+            <a:ext cx="91440" cy="128016"/>
+          </a:xfrm>
+          <a:prstGeom prst="rect">
+            <a:avLst/>
+          </a:prstGeom>
+          <a:noFill/>
+          <a:ln/>
+        </p:spPr>
+        <p:txBody>
+          <a:bodyPr wrap="square" lIns="0" tIns="0" rIns="0" bIns="0" rtlCol="0" anchor="ctr"/>
+          <a:lstStyle/>
+          <a:p>
+            <a:pPr algn="ctr" indent="0" marL="0">
+              <a:buNone/>
+            </a:pPr>
+            <a:r>
+              <a:rPr lang="en-US" sz="650" b="1" dirty="0">
+                <a:solidFill>
+                  <a:srgbClr val="B91C1C"/>
+                </a:solidFill>
+                <a:latin typeface="Yu Gothic" pitchFamily="34" charset="0"/>
+                <a:ea typeface="Yu Gothic" pitchFamily="34" charset="-122"/>
+                <a:cs typeface="Yu Gothic" pitchFamily="34" charset="-120"/>
+              </a:rPr>
+              <a:t>N</a:t>
+            </a:r>
+            <a:endParaRPr lang="en-US" sz="650" dirty="0"/>
+          </a:p>
+        </p:txBody>
+      </p:sp>
+      <p:sp>
+        <p:nvSpPr>
+          <p:cNvPr id="178" name="Text 176"/>
+          <p:cNvSpPr/>
+          <p:nvPr/>
+        </p:nvSpPr>
+        <p:spPr>
+          <a:xfrm>
+            <a:off x="3794760" y="3328416"/>
+            <a:ext cx="91440" cy="128016"/>
+          </a:xfrm>
+          <a:prstGeom prst="rect">
+            <a:avLst/>
+          </a:prstGeom>
+          <a:noFill/>
+          <a:ln/>
+        </p:spPr>
+        <p:txBody>
+          <a:bodyPr wrap="square" lIns="0" tIns="0" rIns="0" bIns="0" rtlCol="0" anchor="ctr"/>
+          <a:lstStyle/>
+          <a:p>
+            <a:pPr algn="ctr" indent="0" marL="0">
+              <a:buNone/>
+            </a:pPr>
+            <a:r>
+              <a:rPr lang="en-US" sz="650" b="1" dirty="0">
+                <a:solidFill>
+                  <a:srgbClr val="B91C1C"/>
+                </a:solidFill>
+                <a:latin typeface="Yu Gothic" pitchFamily="34" charset="0"/>
+                <a:ea typeface="Yu Gothic" pitchFamily="34" charset="-122"/>
+                <a:cs typeface="Yu Gothic" pitchFamily="34" charset="-120"/>
+              </a:rPr>
+              <a:t>1</a:t>
+            </a:r>
+            <a:endParaRPr lang="en-US" sz="650" dirty="0"/>
+          </a:p>
+        </p:txBody>
+      </p:sp>
+      <p:sp>
+        <p:nvSpPr>
+          <p:cNvPr id="179" name="Text 177"/>
+          <p:cNvSpPr/>
+          <p:nvPr/>
+        </p:nvSpPr>
+        <p:spPr>
+          <a:xfrm>
+            <a:off x="3794760" y="3191256"/>
+            <a:ext cx="91440" cy="128016"/>
+          </a:xfrm>
+          <a:prstGeom prst="rect">
+            <a:avLst/>
+          </a:prstGeom>
+          <a:noFill/>
+          <a:ln/>
+        </p:spPr>
+        <p:txBody>
+          <a:bodyPr wrap="square" lIns="0" tIns="0" rIns="0" bIns="0" rtlCol="0" anchor="ctr"/>
+          <a:lstStyle/>
+          <a:p>
+            <a:pPr algn="ctr" indent="0" marL="0">
+              <a:buNone/>
+            </a:pPr>
+            <a:r>
+              <a:rPr lang="en-US" sz="650" b="1" dirty="0">
+                <a:solidFill>
+                  <a:srgbClr val="B91C1C"/>
+                </a:solidFill>
+                <a:latin typeface="Yu Gothic" pitchFamily="34" charset="0"/>
+                <a:ea typeface="Yu Gothic" pitchFamily="34" charset="-122"/>
+                <a:cs typeface="Yu Gothic" pitchFamily="34" charset="-120"/>
+              </a:rPr>
+              <a:t>N</a:t>
+            </a:r>
+            <a:endParaRPr lang="en-US" sz="650" dirty="0"/>
+          </a:p>
+        </p:txBody>
+      </p:sp>
+      <p:sp>
+        <p:nvSpPr>
+          <p:cNvPr id="180" name="Text 178"/>
+          <p:cNvSpPr/>
+          <p:nvPr/>
+        </p:nvSpPr>
+        <p:spPr>
+          <a:xfrm>
+            <a:off x="4389120" y="3611880"/>
+            <a:ext cx="91440" cy="128016"/>
+          </a:xfrm>
+          <a:prstGeom prst="rect">
+            <a:avLst/>
+          </a:prstGeom>
+          <a:noFill/>
+          <a:ln/>
+        </p:spPr>
+        <p:txBody>
+          <a:bodyPr wrap="square" lIns="0" tIns="0" rIns="0" bIns="0" rtlCol="0" anchor="ctr"/>
+          <a:lstStyle/>
+          <a:p>
+            <a:pPr algn="ctr" indent="0" marL="0">
+              <a:buNone/>
+            </a:pPr>
+            <a:r>
+              <a:rPr lang="en-US" sz="650" b="1" dirty="0">
+                <a:solidFill>
+                  <a:srgbClr val="B91C1C"/>
+                </a:solidFill>
+                <a:latin typeface="Yu Gothic" pitchFamily="34" charset="0"/>
+                <a:ea typeface="Yu Gothic" pitchFamily="34" charset="-122"/>
+                <a:cs typeface="Yu Gothic" pitchFamily="34" charset="-120"/>
+              </a:rPr>
+              <a:t>1</a:t>
+            </a:r>
+            <a:endParaRPr lang="en-US" sz="650" dirty="0"/>
+          </a:p>
+        </p:txBody>
+      </p:sp>
+      <p:sp>
+        <p:nvSpPr>
+          <p:cNvPr id="181" name="Text 179"/>
+          <p:cNvSpPr/>
+          <p:nvPr/>
+        </p:nvSpPr>
+        <p:spPr>
+          <a:xfrm>
+            <a:off x="4480560" y="3703320"/>
+            <a:ext cx="91440" cy="128016"/>
+          </a:xfrm>
+          <a:prstGeom prst="rect">
+            <a:avLst/>
+          </a:prstGeom>
+          <a:noFill/>
+          <a:ln/>
+        </p:spPr>
+        <p:txBody>
+          <a:bodyPr wrap="square" lIns="0" tIns="0" rIns="0" bIns="0" rtlCol="0" anchor="ctr"/>
+          <a:lstStyle/>
+          <a:p>
+            <a:pPr algn="ctr" indent="0" marL="0">
+              <a:buNone/>
+            </a:pPr>
+            <a:r>
+              <a:rPr lang="en-US" sz="650" b="1" dirty="0">
+                <a:solidFill>
+                  <a:srgbClr val="B91C1C"/>
+                </a:solidFill>
+                <a:latin typeface="Yu Gothic" pitchFamily="34" charset="0"/>
+                <a:ea typeface="Yu Gothic" pitchFamily="34" charset="-122"/>
+                <a:cs typeface="Yu Gothic" pitchFamily="34" charset="-120"/>
+              </a:rPr>
+              <a:t>N</a:t>
+            </a:r>
+            <a:endParaRPr lang="en-US" sz="650" dirty="0"/>
+          </a:p>
+        </p:txBody>
+      </p:sp>
+      <p:sp>
+        <p:nvSpPr>
+          <p:cNvPr id="182" name="Text 180"/>
           <p:cNvSpPr/>
           <p:nvPr/>
         </p:nvSpPr>
@@ -5457,6 +6956,45 @@
                 <a:ea typeface="Yu Gothic" pitchFamily="34" charset="-122"/>
                 <a:cs typeface="Yu Gothic" pitchFamily="34" charset="-120"/>
               </a:rPr>
+              <a:t>1</a:t>
+            </a:r>
+            <a:endParaRPr lang="en-US" sz="650" dirty="0"/>
+          </a:p>
+        </p:txBody>
+      </p:sp>
+      <p:sp>
+        <p:nvSpPr>
+          <p:cNvPr id="183" name="Text 181"/>
+          <p:cNvSpPr/>
+          <p:nvPr/>
+        </p:nvSpPr>
+        <p:spPr>
+          <a:xfrm>
+            <a:off x="1463040" y="3703320"/>
+            <a:ext cx="91440" cy="128016"/>
+          </a:xfrm>
+          <a:prstGeom prst="rect">
+            <a:avLst/>
+          </a:prstGeom>
+          <a:noFill/>
+          <a:ln/>
+        </p:spPr>
+        <p:txBody>
+          <a:bodyPr wrap="square" lIns="0" tIns="0" rIns="0" bIns="0" rtlCol="0" anchor="ctr"/>
+          <a:lstStyle/>
+          <a:p>
+            <a:pPr algn="ctr" indent="0" marL="0">
+              <a:buNone/>
+            </a:pPr>
+            <a:r>
+              <a:rPr lang="en-US" sz="650" b="1" dirty="0">
+                <a:solidFill>
+                  <a:srgbClr val="B91C1C"/>
+                </a:solidFill>
+                <a:latin typeface="Yu Gothic" pitchFamily="34" charset="0"/>
+                <a:ea typeface="Yu Gothic" pitchFamily="34" charset="-122"/>
+                <a:cs typeface="Yu Gothic" pitchFamily="34" charset="-120"/>
+              </a:rPr>
               <a:t>N</a:t>
             </a:r>
             <a:endParaRPr lang="en-US" sz="650" dirty="0"/>
@@ -5465,7 +7003,7 @@
       </p:sp>
       <p:sp>
         <p:nvSpPr>
-          <p:cNvPr id="137" name="Text 135"/>
+          <p:cNvPr id="184" name="Text 182"/>
           <p:cNvSpPr/>
           <p:nvPr/>
         </p:nvSpPr>
@@ -5496,7 +7034,7 @@
                 <a:ea typeface="Yu Gothic" pitchFamily="34" charset="-122"/>
                 <a:cs typeface="Yu Gothic" pitchFamily="34" charset="-120"/>
               </a:rPr>
-              <a:t>凡例: 1 = 親側、N = 子側（1対多）。橙の破線 = 子の PK が親の Id を兼ねる 1対1。FK を持たないマスタ（Kishu・Kyuusha・Kyousouba）は、Shussouba の列から論理的に参照されるだけで、制約はありません。</a:t>
+              <a:t>凡例: 1 = 親側、N = 子側（1対多）。橙の破線 = 子の PK が親の Id を兼ねる 1対1。青の点線 = FK 制約が無く、列名（KyousoubaId・KishuId・KyuushaId・KishuShozokuKyuushaId・Domain）から推定した関連。Code は各テーブルのコード列（例: KishuTouzaiBetsu）の値を定義するが列ごとの制約は無く、UserSQL は Domain（処理名）で呼ばれるSQLの置き場で、テーブルとの関連は無い。</a:t>
             </a:r>
             <a:endParaRPr lang="en-US" sz="750" dirty="0"/>
           </a:p>
@@ -5781,8 +7319,8 @@
         </p:nvSpPr>
         <p:spPr>
           <a:xfrm>
-            <a:off x="1266444" y="2560320"/>
-            <a:ext cx="160020" cy="0"/>
+            <a:off x="1330452" y="2560320"/>
+            <a:ext cx="96012" cy="0"/>
           </a:xfrm>
           <a:prstGeom prst="line">
             <a:avLst/>
@@ -5804,7 +7342,7 @@
         </p:nvSpPr>
         <p:spPr>
           <a:xfrm>
-            <a:off x="1266444" y="2331720"/>
+            <a:off x="1330452" y="2331720"/>
             <a:ext cx="0" cy="228600"/>
           </a:xfrm>
           <a:prstGeom prst="line">
@@ -5828,7 +7366,7 @@
         <p:spPr>
           <a:xfrm>
             <a:off x="1234440" y="2331720"/>
-            <a:ext cx="32004" cy="0"/>
+            <a:ext cx="96012" cy="0"/>
           </a:xfrm>
           <a:prstGeom prst="line">
             <a:avLst/>
@@ -5850,8 +7388,8 @@
         </p:nvSpPr>
         <p:spPr>
           <a:xfrm>
-            <a:off x="1266444" y="2560320"/>
-            <a:ext cx="160020" cy="0"/>
+            <a:off x="1330452" y="2560320"/>
+            <a:ext cx="96012" cy="0"/>
           </a:xfrm>
           <a:prstGeom prst="line">
             <a:avLst/>
@@ -5873,7 +7411,7 @@
         </p:nvSpPr>
         <p:spPr>
           <a:xfrm>
-            <a:off x="1266444" y="2560320"/>
+            <a:off x="1330452" y="2560320"/>
             <a:ext cx="0" cy="228600"/>
           </a:xfrm>
           <a:prstGeom prst="line">
@@ -5897,7 +7435,7 @@
         <p:spPr>
           <a:xfrm>
             <a:off x="1234440" y="2788920"/>
-            <a:ext cx="32004" cy="0"/>
+            <a:ext cx="96012" cy="0"/>
           </a:xfrm>
           <a:prstGeom prst="line">
             <a:avLst/>
@@ -5919,8 +7457,8 @@
         </p:nvSpPr>
         <p:spPr>
           <a:xfrm>
-            <a:off x="1266444" y="2560320"/>
-            <a:ext cx="160020" cy="0"/>
+            <a:off x="1330452" y="2560320"/>
+            <a:ext cx="96012" cy="0"/>
           </a:xfrm>
           <a:prstGeom prst="line">
             <a:avLst/>
@@ -5942,7 +7480,7 @@
         </p:nvSpPr>
         <p:spPr>
           <a:xfrm>
-            <a:off x="1266444" y="2560320"/>
+            <a:off x="1330452" y="2560320"/>
             <a:ext cx="0" cy="685800"/>
           </a:xfrm>
           <a:prstGeom prst="line">
@@ -5966,7 +7504,7 @@
         <p:spPr>
           <a:xfrm>
             <a:off x="1234440" y="3246120"/>
-            <a:ext cx="32004" cy="0"/>
+            <a:ext cx="96012" cy="0"/>
           </a:xfrm>
           <a:prstGeom prst="line">
             <a:avLst/>
@@ -5988,8 +7526,8 @@
         </p:nvSpPr>
         <p:spPr>
           <a:xfrm>
-            <a:off x="1266444" y="2560320"/>
-            <a:ext cx="160020" cy="0"/>
+            <a:off x="1330452" y="2560320"/>
+            <a:ext cx="96012" cy="0"/>
           </a:xfrm>
           <a:prstGeom prst="line">
             <a:avLst/>
@@ -6011,7 +7549,7 @@
         </p:nvSpPr>
         <p:spPr>
           <a:xfrm>
-            <a:off x="1266444" y="2560320"/>
+            <a:off x="1330452" y="2560320"/>
             <a:ext cx="0" cy="1143000"/>
           </a:xfrm>
           <a:prstGeom prst="line">
@@ -6035,7 +7573,7 @@
         <p:spPr>
           <a:xfrm>
             <a:off x="1234440" y="3703320"/>
-            <a:ext cx="32004" cy="0"/>
+            <a:ext cx="96012" cy="0"/>
           </a:xfrm>
           <a:prstGeom prst="line">
             <a:avLst/>
@@ -7046,8 +8584,8 @@
         </p:nvSpPr>
         <p:spPr>
           <a:xfrm>
-            <a:off x="2510028" y="3703320"/>
-            <a:ext cx="160020" cy="0"/>
+            <a:off x="2542032" y="3703320"/>
+            <a:ext cx="128016" cy="0"/>
           </a:xfrm>
           <a:prstGeom prst="line">
             <a:avLst/>
@@ -7070,7 +8608,7 @@
         <p:spPr>
           <a:xfrm>
             <a:off x="2478024" y="3703320"/>
-            <a:ext cx="32004" cy="0"/>
+            <a:ext cx="64008" cy="0"/>
           </a:xfrm>
           <a:prstGeom prst="line">
             <a:avLst/>
@@ -7391,8 +8929,8 @@
         </p:nvSpPr>
         <p:spPr>
           <a:xfrm>
-            <a:off x="2542032" y="1417320"/>
-            <a:ext cx="128016" cy="0"/>
+            <a:off x="2574036" y="1417320"/>
+            <a:ext cx="96012" cy="0"/>
           </a:xfrm>
           <a:prstGeom prst="line">
             <a:avLst/>
@@ -7415,7 +8953,7 @@
         <p:spPr>
           <a:xfrm>
             <a:off x="2478024" y="1417320"/>
-            <a:ext cx="64008" cy="0"/>
+            <a:ext cx="96012" cy="0"/>
           </a:xfrm>
           <a:prstGeom prst="line">
             <a:avLst/>
@@ -7460,8 +8998,8 @@
         </p:nvSpPr>
         <p:spPr>
           <a:xfrm>
-            <a:off x="2574036" y="4160520"/>
-            <a:ext cx="96012" cy="0"/>
+            <a:off x="2606040" y="4160520"/>
+            <a:ext cx="64008" cy="0"/>
           </a:xfrm>
           <a:prstGeom prst="line">
             <a:avLst/>
@@ -7484,7 +9022,7 @@
         <p:spPr>
           <a:xfrm>
             <a:off x="2478024" y="4160520"/>
-            <a:ext cx="96012" cy="0"/>
+            <a:ext cx="128016" cy="0"/>
           </a:xfrm>
           <a:prstGeom prst="line">
             <a:avLst/>
@@ -7506,8 +9044,8 @@
         </p:nvSpPr>
         <p:spPr>
           <a:xfrm>
-            <a:off x="2606040" y="960120"/>
-            <a:ext cx="64008" cy="0"/>
+            <a:off x="2638044" y="960120"/>
+            <a:ext cx="32004" cy="0"/>
           </a:xfrm>
           <a:prstGeom prst="line">
             <a:avLst/>
@@ -7530,7 +9068,7 @@
         <p:spPr>
           <a:xfrm>
             <a:off x="2478024" y="960120"/>
-            <a:ext cx="128016" cy="0"/>
+            <a:ext cx="160020" cy="0"/>
           </a:xfrm>
           <a:prstGeom prst="line">
             <a:avLst/>

--- a/docs/database-structure.pptx
+++ b/docs/database-structure.pptx
@@ -8317,9 +8317,9 @@
           <a:noFill/>
           <a:ln w="12700">
             <a:solidFill>
-              <a:srgbClr val="B45309"/>
-            </a:solidFill>
-            <a:prstDash val="dash"/>
+              <a:srgbClr val="6B7280"/>
+            </a:solidFill>
+            <a:prstDash val="solid"/>
           </a:ln>
         </p:spPr>
       </p:sp>
@@ -8340,9 +8340,9 @@
           <a:noFill/>
           <a:ln w="12700">
             <a:solidFill>
-              <a:srgbClr val="B45309"/>
-            </a:solidFill>
-            <a:prstDash val="dash"/>
+              <a:srgbClr val="6B7280"/>
+            </a:solidFill>
+            <a:prstDash val="solid"/>
           </a:ln>
         </p:spPr>
       </p:sp>
@@ -8363,9 +8363,9 @@
           <a:noFill/>
           <a:ln w="12700">
             <a:solidFill>
-              <a:srgbClr val="B45309"/>
-            </a:solidFill>
-            <a:prstDash val="dash"/>
+              <a:srgbClr val="6B7280"/>
+            </a:solidFill>
+            <a:prstDash val="solid"/>
           </a:ln>
         </p:spPr>
       </p:sp>
@@ -9069,6 +9069,98 @@
           <a:xfrm>
             <a:off x="2478024" y="960120"/>
             <a:ext cx="160020" cy="0"/>
+          </a:xfrm>
+          <a:prstGeom prst="line">
+            <a:avLst/>
+          </a:prstGeom>
+          <a:noFill/>
+          <a:ln w="12700">
+            <a:solidFill>
+              <a:srgbClr val="6B7280"/>
+            </a:solidFill>
+            <a:prstDash val="solid"/>
+          </a:ln>
+        </p:spPr>
+      </p:sp>
+      <p:sp>
+        <p:nvSpPr>
+          <p:cNvPr id="261" name="Shape 259"/>
+          <p:cNvSpPr/>
+          <p:nvPr/>
+        </p:nvSpPr>
+        <p:spPr>
+          <a:xfrm>
+            <a:off x="2286000" y="1188720"/>
+            <a:ext cx="0" cy="91440"/>
+          </a:xfrm>
+          <a:prstGeom prst="line">
+            <a:avLst/>
+          </a:prstGeom>
+          <a:noFill/>
+          <a:ln w="12700">
+            <a:solidFill>
+              <a:srgbClr val="6B7280"/>
+            </a:solidFill>
+            <a:prstDash val="solid"/>
+          </a:ln>
+        </p:spPr>
+      </p:sp>
+      <p:sp>
+        <p:nvSpPr>
+          <p:cNvPr id="262" name="Shape 260"/>
+          <p:cNvSpPr/>
+          <p:nvPr/>
+        </p:nvSpPr>
+        <p:spPr>
+          <a:xfrm>
+            <a:off x="2286000" y="1188720"/>
+            <a:ext cx="5349240" cy="0"/>
+          </a:xfrm>
+          <a:prstGeom prst="line">
+            <a:avLst/>
+          </a:prstGeom>
+          <a:noFill/>
+          <a:ln w="12700">
+            <a:solidFill>
+              <a:srgbClr val="6B7280"/>
+            </a:solidFill>
+            <a:prstDash val="solid"/>
+          </a:ln>
+        </p:spPr>
+      </p:sp>
+      <p:sp>
+        <p:nvSpPr>
+          <p:cNvPr id="263" name="Shape 261"/>
+          <p:cNvSpPr/>
+          <p:nvPr/>
+        </p:nvSpPr>
+        <p:spPr>
+          <a:xfrm>
+            <a:off x="7635240" y="1188720"/>
+            <a:ext cx="0" cy="2057400"/>
+          </a:xfrm>
+          <a:prstGeom prst="line">
+            <a:avLst/>
+          </a:prstGeom>
+          <a:noFill/>
+          <a:ln w="12700">
+            <a:solidFill>
+              <a:srgbClr val="6B7280"/>
+            </a:solidFill>
+            <a:prstDash val="solid"/>
+          </a:ln>
+        </p:spPr>
+      </p:sp>
+      <p:sp>
+        <p:nvSpPr>
+          <p:cNvPr id="264" name="Shape 262"/>
+          <p:cNvSpPr/>
+          <p:nvPr/>
+        </p:nvSpPr>
+        <p:spPr>
+          <a:xfrm>
+            <a:off x="6208776" y="3246120"/>
+            <a:ext cx="1426464" cy="0"/>
           </a:xfrm>
           <a:prstGeom prst="line">
             <a:avLst/>
@@ -13662,7 +13754,7 @@
                 <a:ea typeface="Yu Gothic" pitchFamily="34" charset="-122"/>
                 <a:cs typeface="Yu Gothic" pitchFamily="34" charset="-120"/>
               </a:rPr>
-              <a:t>1</a:t>
+              <a:t>N</a:t>
             </a:r>
             <a:endParaRPr lang="en-US" sz="650" dirty="0"/>
           </a:p>
@@ -14144,7 +14236,7 @@
         </p:nvSpPr>
         <p:spPr>
           <a:xfrm>
-            <a:off x="4485132" y="1115568"/>
+            <a:off x="4485132" y="1243584"/>
             <a:ext cx="91440" cy="128016"/>
           </a:xfrm>
           <a:prstGeom prst="rect">
@@ -14808,6 +14900,84 @@
         <p:spPr>
           <a:xfrm>
             <a:off x="2478024" y="813816"/>
+            <a:ext cx="91440" cy="128016"/>
+          </a:xfrm>
+          <a:prstGeom prst="rect">
+            <a:avLst/>
+          </a:prstGeom>
+          <a:noFill/>
+          <a:ln/>
+        </p:spPr>
+        <p:txBody>
+          <a:bodyPr wrap="square" lIns="0" tIns="0" rIns="0" bIns="0" rtlCol="0" anchor="ctr"/>
+          <a:lstStyle/>
+          <a:p>
+            <a:pPr algn="ctr" indent="0" marL="0">
+              <a:buNone/>
+            </a:pPr>
+            <a:r>
+              <a:rPr lang="en-US" sz="650" b="1" dirty="0">
+                <a:solidFill>
+                  <a:srgbClr val="B91C1C"/>
+                </a:solidFill>
+                <a:latin typeface="Yu Gothic" pitchFamily="34" charset="0"/>
+                <a:ea typeface="Yu Gothic" pitchFamily="34" charset="-122"/>
+                <a:cs typeface="Yu Gothic" pitchFamily="34" charset="-120"/>
+              </a:rPr>
+              <a:t>N</a:t>
+            </a:r>
+            <a:endParaRPr lang="en-US" sz="650" dirty="0"/>
+          </a:p>
+        </p:txBody>
+      </p:sp>
+      <p:sp>
+        <p:nvSpPr>
+          <p:cNvPr id="265" name="Text 263"/>
+          <p:cNvSpPr/>
+          <p:nvPr/>
+        </p:nvSpPr>
+        <p:spPr>
+          <a:xfrm>
+            <a:off x="2304288" y="1147572"/>
+            <a:ext cx="91440" cy="128016"/>
+          </a:xfrm>
+          <a:prstGeom prst="rect">
+            <a:avLst/>
+          </a:prstGeom>
+          <a:noFill/>
+          <a:ln/>
+        </p:spPr>
+        <p:txBody>
+          <a:bodyPr wrap="square" lIns="0" tIns="0" rIns="0" bIns="0" rtlCol="0" anchor="ctr"/>
+          <a:lstStyle/>
+          <a:p>
+            <a:pPr algn="ctr" indent="0" marL="0">
+              <a:buNone/>
+            </a:pPr>
+            <a:r>
+              <a:rPr lang="en-US" sz="650" b="1" dirty="0">
+                <a:solidFill>
+                  <a:srgbClr val="B91C1C"/>
+                </a:solidFill>
+                <a:latin typeface="Yu Gothic" pitchFamily="34" charset="0"/>
+                <a:ea typeface="Yu Gothic" pitchFamily="34" charset="-122"/>
+                <a:cs typeface="Yu Gothic" pitchFamily="34" charset="-120"/>
+              </a:rPr>
+              <a:t>1</a:t>
+            </a:r>
+            <a:endParaRPr lang="en-US" sz="650" dirty="0"/>
+          </a:p>
+        </p:txBody>
+      </p:sp>
+      <p:sp>
+        <p:nvSpPr>
+          <p:cNvPr id="266" name="Text 264"/>
+          <p:cNvSpPr/>
+          <p:nvPr/>
+        </p:nvSpPr>
+        <p:spPr>
+          <a:xfrm>
+            <a:off x="6217920" y="3099816"/>
             <a:ext cx="91440" cy="128016"/>
           </a:xfrm>
           <a:prstGeom prst="rect">
